--- a/PPTs/Ch8_ARM_Subroutines_Exercises ANS.pptx
+++ b/PPTs/Ch8_ARM_Subroutines_Exercises ANS.pptx
@@ -36,18 +36,18 @@
     <p:sldId id="764" r:id="rId24"/>
     <p:sldId id="281" r:id="rId25"/>
     <p:sldId id="282" r:id="rId26"/>
-    <p:sldId id="821" r:id="rId27"/>
-    <p:sldId id="283" r:id="rId28"/>
-    <p:sldId id="286" r:id="rId29"/>
-    <p:sldId id="353" r:id="rId30"/>
-    <p:sldId id="354" r:id="rId31"/>
-    <p:sldId id="757" r:id="rId32"/>
-    <p:sldId id="751" r:id="rId33"/>
-    <p:sldId id="752" r:id="rId34"/>
-    <p:sldId id="756" r:id="rId35"/>
-    <p:sldId id="818" r:id="rId36"/>
-    <p:sldId id="819" r:id="rId37"/>
-    <p:sldId id="820" r:id="rId38"/>
+    <p:sldId id="818" r:id="rId27"/>
+    <p:sldId id="819" r:id="rId28"/>
+    <p:sldId id="820" r:id="rId29"/>
+    <p:sldId id="821" r:id="rId30"/>
+    <p:sldId id="283" r:id="rId31"/>
+    <p:sldId id="286" r:id="rId32"/>
+    <p:sldId id="353" r:id="rId33"/>
+    <p:sldId id="354" r:id="rId34"/>
+    <p:sldId id="757" r:id="rId35"/>
+    <p:sldId id="751" r:id="rId36"/>
+    <p:sldId id="752" r:id="rId37"/>
+    <p:sldId id="756" r:id="rId38"/>
   </p:sldIdLst>
   <p:sldSz cx="9144000" cy="6858000" type="screen4x3"/>
   <p:notesSz cx="6950075" cy="9236075"/>
@@ -168,7 +168,7 @@
 <file path=ppt/revisionInfo.xml><?xml version="1.0" encoding="utf-8"?>
 <p1510:revInfo xmlns:a="http://schemas.openxmlformats.org/drawingml/2006/main" xmlns:r="http://schemas.openxmlformats.org/officeDocument/2006/relationships" xmlns:p1510="http://schemas.microsoft.com/office/powerpoint/2015/10/main">
   <p1510:revLst>
-    <p1510:client id="{5041633D-0D65-4A33-A002-41B0B2F0F46B}" v="22" dt="2025-12-03T01:57:24.095"/>
+    <p1510:client id="{235CFAAB-C8C1-4DD9-9F50-5A543D35DA07}" v="3" dt="2026-04-23T15:02:55.362"/>
   </p1510:revLst>
 </p1510:revInfo>
 </file>
@@ -178,395 +178,66 @@
   <pc:docChgLst>
     <pc:chgData name="Zonghua Gu" userId="9a7e1853e1951ef5" providerId="LiveId" clId="{CF1FAA12-072C-4ED5-BA76-0FFFAEFDB88A}"/>
     <pc:docChg chg="undo redo custSel addSld delSld modSld sldOrd">
-      <pc:chgData name="Zonghua Gu" userId="9a7e1853e1951ef5" providerId="LiveId" clId="{CF1FAA12-072C-4ED5-BA76-0FFFAEFDB88A}" dt="2025-12-03T01:57:29.826" v="4879" actId="1076"/>
+      <pc:chgData name="Zonghua Gu" userId="9a7e1853e1951ef5" providerId="LiveId" clId="{CF1FAA12-072C-4ED5-BA76-0FFFAEFDB88A}" dt="2026-04-23T15:02:55.362" v="4897"/>
       <pc:docMkLst>
         <pc:docMk/>
       </pc:docMkLst>
-      <pc:sldChg chg="modSp mod">
-        <pc:chgData name="Zonghua Gu" userId="9a7e1853e1951ef5" providerId="LiveId" clId="{CF1FAA12-072C-4ED5-BA76-0FFFAEFDB88A}" dt="2025-12-03T01:41:30.064" v="4749"/>
-        <pc:sldMkLst>
-          <pc:docMk/>
-          <pc:sldMk cId="1814278120" sldId="258"/>
-        </pc:sldMkLst>
-        <pc:spChg chg="mod">
-          <ac:chgData name="Zonghua Gu" userId="9a7e1853e1951ef5" providerId="LiveId" clId="{CF1FAA12-072C-4ED5-BA76-0FFFAEFDB88A}" dt="2025-12-03T01:41:30.064" v="4749"/>
-          <ac:spMkLst>
-            <pc:docMk/>
-            <pc:sldMk cId="1814278120" sldId="258"/>
-            <ac:spMk id="4" creationId="{888CA4B8-E23A-61B6-D388-BD1EFFC38D5F}"/>
-          </ac:spMkLst>
-        </pc:spChg>
-      </pc:sldChg>
-      <pc:sldChg chg="modSp mod">
-        <pc:chgData name="Zonghua Gu" userId="9a7e1853e1951ef5" providerId="LiveId" clId="{CF1FAA12-072C-4ED5-BA76-0FFFAEFDB88A}" dt="2025-12-03T01:32:35.930" v="4745" actId="20577"/>
-        <pc:sldMkLst>
-          <pc:docMk/>
-          <pc:sldMk cId="4018749421" sldId="281"/>
-        </pc:sldMkLst>
-        <pc:graphicFrameChg chg="mod modGraphic">
-          <ac:chgData name="Zonghua Gu" userId="9a7e1853e1951ef5" providerId="LiveId" clId="{CF1FAA12-072C-4ED5-BA76-0FFFAEFDB88A}" dt="2025-12-03T01:32:35.930" v="4745" actId="20577"/>
-          <ac:graphicFrameMkLst>
-            <pc:docMk/>
-            <pc:sldMk cId="4018749421" sldId="281"/>
-            <ac:graphicFrameMk id="6" creationId="{441ADC90-ADB8-D7DD-0AC3-9F57EB29BD9E}"/>
-          </ac:graphicFrameMkLst>
-        </pc:graphicFrameChg>
-      </pc:sldChg>
-      <pc:sldChg chg="modSp mod">
-        <pc:chgData name="Zonghua Gu" userId="9a7e1853e1951ef5" providerId="LiveId" clId="{CF1FAA12-072C-4ED5-BA76-0FFFAEFDB88A}" dt="2025-12-03T01:32:53.391" v="4747" actId="20577"/>
-        <pc:sldMkLst>
-          <pc:docMk/>
-          <pc:sldMk cId="623618619" sldId="282"/>
-        </pc:sldMkLst>
-        <pc:graphicFrameChg chg="mod modGraphic">
-          <ac:chgData name="Zonghua Gu" userId="9a7e1853e1951ef5" providerId="LiveId" clId="{CF1FAA12-072C-4ED5-BA76-0FFFAEFDB88A}" dt="2025-12-03T01:01:57.301" v="4459" actId="20577"/>
-          <ac:graphicFrameMkLst>
-            <pc:docMk/>
-            <pc:sldMk cId="623618619" sldId="282"/>
-            <ac:graphicFrameMk id="4" creationId="{058C7988-0F62-036F-DDF3-1121F4620528}"/>
-          </ac:graphicFrameMkLst>
-        </pc:graphicFrameChg>
-        <pc:graphicFrameChg chg="modGraphic">
-          <ac:chgData name="Zonghua Gu" userId="9a7e1853e1951ef5" providerId="LiveId" clId="{CF1FAA12-072C-4ED5-BA76-0FFFAEFDB88A}" dt="2025-12-03T01:32:53.391" v="4747" actId="20577"/>
-          <ac:graphicFrameMkLst>
-            <pc:docMk/>
-            <pc:sldMk cId="623618619" sldId="282"/>
-            <ac:graphicFrameMk id="6" creationId="{CC203EDA-BA4D-8B0A-42B8-FE11C464F19D}"/>
-          </ac:graphicFrameMkLst>
-        </pc:graphicFrameChg>
-      </pc:sldChg>
-      <pc:sldChg chg="modSp mod">
-        <pc:chgData name="Zonghua Gu" userId="9a7e1853e1951ef5" providerId="LiveId" clId="{CF1FAA12-072C-4ED5-BA76-0FFFAEFDB88A}" dt="2025-12-03T00:42:12.102" v="4402" actId="20577"/>
-        <pc:sldMkLst>
-          <pc:docMk/>
-          <pc:sldMk cId="1767069891" sldId="283"/>
-        </pc:sldMkLst>
-        <pc:graphicFrameChg chg="modGraphic">
-          <ac:chgData name="Zonghua Gu" userId="9a7e1853e1951ef5" providerId="LiveId" clId="{CF1FAA12-072C-4ED5-BA76-0FFFAEFDB88A}" dt="2025-12-03T00:42:12.102" v="4402" actId="20577"/>
-          <ac:graphicFrameMkLst>
-            <pc:docMk/>
-            <pc:sldMk cId="1767069891" sldId="283"/>
-            <ac:graphicFrameMk id="5" creationId="{D029E53D-EF51-C81E-B5A8-ACE61F697AF7}"/>
-          </ac:graphicFrameMkLst>
-        </pc:graphicFrameChg>
-      </pc:sldChg>
-      <pc:sldChg chg="modSp mod">
-        <pc:chgData name="Zonghua Gu" userId="9a7e1853e1951ef5" providerId="LiveId" clId="{CF1FAA12-072C-4ED5-BA76-0FFFAEFDB88A}" dt="2025-12-03T01:15:39.007" v="4557" actId="14100"/>
-        <pc:sldMkLst>
-          <pc:docMk/>
-          <pc:sldMk cId="2707139683" sldId="353"/>
-        </pc:sldMkLst>
-        <pc:spChg chg="mod">
-          <ac:chgData name="Zonghua Gu" userId="9a7e1853e1951ef5" providerId="LiveId" clId="{CF1FAA12-072C-4ED5-BA76-0FFFAEFDB88A}" dt="2025-12-03T01:15:29.437" v="4555" actId="20577"/>
-          <ac:spMkLst>
-            <pc:docMk/>
-            <pc:sldMk cId="2707139683" sldId="353"/>
-            <ac:spMk id="4" creationId="{591F8C61-3E91-895F-2C57-5743F12F4706}"/>
-          </ac:spMkLst>
-        </pc:spChg>
-        <pc:spChg chg="mod">
-          <ac:chgData name="Zonghua Gu" userId="9a7e1853e1951ef5" providerId="LiveId" clId="{CF1FAA12-072C-4ED5-BA76-0FFFAEFDB88A}" dt="2025-12-03T01:15:39.007" v="4557" actId="14100"/>
-          <ac:spMkLst>
-            <pc:docMk/>
-            <pc:sldMk cId="2707139683" sldId="353"/>
-            <ac:spMk id="5" creationId="{8A76ECE7-0B5A-383E-0091-ADC927BEEC87}"/>
-          </ac:spMkLst>
-        </pc:spChg>
-        <pc:spChg chg="mod">
-          <ac:chgData name="Zonghua Gu" userId="9a7e1853e1951ef5" providerId="LiveId" clId="{CF1FAA12-072C-4ED5-BA76-0FFFAEFDB88A}" dt="2025-12-03T01:15:36.622" v="4556" actId="14100"/>
-          <ac:spMkLst>
-            <pc:docMk/>
-            <pc:sldMk cId="2707139683" sldId="353"/>
-            <ac:spMk id="6" creationId="{45D15B45-A356-638A-35FB-768B7AA8995D}"/>
-          </ac:spMkLst>
-        </pc:spChg>
-      </pc:sldChg>
-      <pc:sldChg chg="modSp mod">
-        <pc:chgData name="Zonghua Gu" userId="9a7e1853e1951ef5" providerId="LiveId" clId="{CF1FAA12-072C-4ED5-BA76-0FFFAEFDB88A}" dt="2025-12-03T01:29:14.742" v="4719" actId="20577"/>
-        <pc:sldMkLst>
-          <pc:docMk/>
-          <pc:sldMk cId="4056115254" sldId="354"/>
-        </pc:sldMkLst>
-        <pc:spChg chg="mod">
-          <ac:chgData name="Zonghua Gu" userId="9a7e1853e1951ef5" providerId="LiveId" clId="{CF1FAA12-072C-4ED5-BA76-0FFFAEFDB88A}" dt="2025-12-03T01:24:17.090" v="4711" actId="20577"/>
-          <ac:spMkLst>
-            <pc:docMk/>
-            <pc:sldMk cId="4056115254" sldId="354"/>
-            <ac:spMk id="4" creationId="{C2EFFC15-913C-F5C8-F67E-5B2B5295992D}"/>
-          </ac:spMkLst>
-        </pc:spChg>
-        <pc:spChg chg="mod">
-          <ac:chgData name="Zonghua Gu" userId="9a7e1853e1951ef5" providerId="LiveId" clId="{CF1FAA12-072C-4ED5-BA76-0FFFAEFDB88A}" dt="2025-12-03T01:29:14.742" v="4719" actId="20577"/>
-          <ac:spMkLst>
-            <pc:docMk/>
-            <pc:sldMk cId="4056115254" sldId="354"/>
-            <ac:spMk id="5" creationId="{B60DE175-89CF-1980-2FF5-09D118299DF7}"/>
-          </ac:spMkLst>
-        </pc:spChg>
-      </pc:sldChg>
-      <pc:sldChg chg="modSp mod">
-        <pc:chgData name="Zonghua Gu" userId="9a7e1853e1951ef5" providerId="LiveId" clId="{CF1FAA12-072C-4ED5-BA76-0FFFAEFDB88A}" dt="2025-12-03T01:29:28.334" v="4722"/>
-        <pc:sldMkLst>
-          <pc:docMk/>
-          <pc:sldMk cId="3049968880" sldId="757"/>
-        </pc:sldMkLst>
-        <pc:spChg chg="mod">
-          <ac:chgData name="Zonghua Gu" userId="9a7e1853e1951ef5" providerId="LiveId" clId="{CF1FAA12-072C-4ED5-BA76-0FFFAEFDB88A}" dt="2025-12-03T01:24:28.805" v="4713" actId="20577"/>
-          <ac:spMkLst>
-            <pc:docMk/>
-            <pc:sldMk cId="3049968880" sldId="757"/>
-            <ac:spMk id="4" creationId="{3149164B-AC7F-262E-85D3-203B21C2369A}"/>
-          </ac:spMkLst>
-        </pc:spChg>
-        <pc:spChg chg="mod">
-          <ac:chgData name="Zonghua Gu" userId="9a7e1853e1951ef5" providerId="LiveId" clId="{CF1FAA12-072C-4ED5-BA76-0FFFAEFDB88A}" dt="2025-12-03T01:29:28.334" v="4722"/>
-          <ac:spMkLst>
-            <pc:docMk/>
-            <pc:sldMk cId="3049968880" sldId="757"/>
-            <ac:spMk id="5" creationId="{B0B60CED-9D05-2D49-66A9-FB9AB6E901FB}"/>
-          </ac:spMkLst>
-        </pc:spChg>
-        <pc:spChg chg="mod">
-          <ac:chgData name="Zonghua Gu" userId="9a7e1853e1951ef5" providerId="LiveId" clId="{CF1FAA12-072C-4ED5-BA76-0FFFAEFDB88A}" dt="2025-12-03T01:13:32.179" v="4513" actId="1036"/>
-          <ac:spMkLst>
-            <pc:docMk/>
-            <pc:sldMk cId="3049968880" sldId="757"/>
-            <ac:spMk id="6" creationId="{FA97F22B-CBD2-A76E-66A6-7632B8BDAF8F}"/>
-          </ac:spMkLst>
-        </pc:spChg>
-      </pc:sldChg>
-      <pc:sldChg chg="add">
-        <pc:chgData name="Zonghua Gu" userId="9a7e1853e1951ef5" providerId="LiveId" clId="{CF1FAA12-072C-4ED5-BA76-0FFFAEFDB88A}" dt="2025-12-03T01:44:59.935" v="4770"/>
-        <pc:sldMkLst>
-          <pc:docMk/>
-          <pc:sldMk cId="2937750711" sldId="763"/>
-        </pc:sldMkLst>
-      </pc:sldChg>
-      <pc:sldChg chg="del">
-        <pc:chgData name="Zonghua Gu" userId="9a7e1853e1951ef5" providerId="LiveId" clId="{CF1FAA12-072C-4ED5-BA76-0FFFAEFDB88A}" dt="2025-12-03T01:44:36.866" v="4769" actId="2696"/>
-        <pc:sldMkLst>
-          <pc:docMk/>
-          <pc:sldMk cId="4214831448" sldId="763"/>
-        </pc:sldMkLst>
-      </pc:sldChg>
-      <pc:sldChg chg="add">
-        <pc:chgData name="Zonghua Gu" userId="9a7e1853e1951ef5" providerId="LiveId" clId="{CF1FAA12-072C-4ED5-BA76-0FFFAEFDB88A}" dt="2025-12-03T01:44:59.935" v="4770"/>
-        <pc:sldMkLst>
-          <pc:docMk/>
-          <pc:sldMk cId="3110859270" sldId="764"/>
-        </pc:sldMkLst>
-      </pc:sldChg>
-      <pc:sldChg chg="modSp del mod">
-        <pc:chgData name="Zonghua Gu" userId="9a7e1853e1951ef5" providerId="LiveId" clId="{CF1FAA12-072C-4ED5-BA76-0FFFAEFDB88A}" dt="2025-12-03T01:44:36.866" v="4769" actId="2696"/>
-        <pc:sldMkLst>
-          <pc:docMk/>
-          <pc:sldMk cId="3848203700" sldId="764"/>
-        </pc:sldMkLst>
-        <pc:spChg chg="mod">
-          <ac:chgData name="Zonghua Gu" userId="9a7e1853e1951ef5" providerId="LiveId" clId="{CF1FAA12-072C-4ED5-BA76-0FFFAEFDB88A}" dt="2025-12-03T01:43:46.439" v="4768" actId="20577"/>
-          <ac:spMkLst>
-            <pc:docMk/>
-            <pc:sldMk cId="3848203700" sldId="764"/>
-            <ac:spMk id="4" creationId="{0707AC2E-44F3-B02C-EC23-E5EB61FA94EB}"/>
-          </ac:spMkLst>
-        </pc:spChg>
-      </pc:sldChg>
       <pc:sldChg chg="addSp delSp modSp add mod modTransition">
-        <pc:chgData name="Zonghua Gu" userId="9a7e1853e1951ef5" providerId="LiveId" clId="{CF1FAA12-072C-4ED5-BA76-0FFFAEFDB88A}" dt="2025-12-03T01:57:29.826" v="4879" actId="1076"/>
+        <pc:chgData name="Zonghua Gu" userId="9a7e1853e1951ef5" providerId="LiveId" clId="{CF1FAA12-072C-4ED5-BA76-0FFFAEFDB88A}" dt="2026-04-23T14:52:38.870" v="4895" actId="20577"/>
         <pc:sldMkLst>
           <pc:docMk/>
           <pc:sldMk cId="436543705" sldId="817"/>
         </pc:sldMkLst>
-        <pc:spChg chg="add mod">
-          <ac:chgData name="Zonghua Gu" userId="9a7e1853e1951ef5" providerId="LiveId" clId="{CF1FAA12-072C-4ED5-BA76-0FFFAEFDB88A}" dt="2025-12-03T00:17:23.412" v="4288" actId="1076"/>
-          <ac:spMkLst>
-            <pc:docMk/>
-            <pc:sldMk cId="436543705" sldId="817"/>
-            <ac:spMk id="6" creationId="{7F0BEA20-3647-D290-9E8E-0B4B87DD74F4}"/>
-          </ac:spMkLst>
-        </pc:spChg>
         <pc:spChg chg="mod">
-          <ac:chgData name="Zonghua Gu" userId="9a7e1853e1951ef5" providerId="LiveId" clId="{CF1FAA12-072C-4ED5-BA76-0FFFAEFDB88A}" dt="2025-12-03T00:21:12.627" v="4392" actId="14100"/>
+          <ac:chgData name="Zonghua Gu" userId="9a7e1853e1951ef5" providerId="LiveId" clId="{CF1FAA12-072C-4ED5-BA76-0FFFAEFDB88A}" dt="2026-04-23T14:52:38.870" v="4895" actId="20577"/>
           <ac:spMkLst>
             <pc:docMk/>
             <pc:sldMk cId="436543705" sldId="817"/>
             <ac:spMk id="11" creationId="{722AEABA-ECF0-EE34-D92D-0B9E8214F92E}"/>
           </ac:spMkLst>
         </pc:spChg>
-        <pc:spChg chg="mod">
-          <ac:chgData name="Zonghua Gu" userId="9a7e1853e1951ef5" providerId="LiveId" clId="{CF1FAA12-072C-4ED5-BA76-0FFFAEFDB88A}" dt="2025-12-03T01:57:29.826" v="4879" actId="1076"/>
-          <ac:spMkLst>
-            <pc:docMk/>
-            <pc:sldMk cId="436543705" sldId="817"/>
-            <ac:spMk id="12" creationId="{A8FE334F-F18A-EB69-90F3-94DB53A49559}"/>
-          </ac:spMkLst>
-        </pc:spChg>
-        <pc:spChg chg="add mod">
-          <ac:chgData name="Zonghua Gu" userId="9a7e1853e1951ef5" providerId="LiveId" clId="{CF1FAA12-072C-4ED5-BA76-0FFFAEFDB88A}" dt="2025-12-03T00:19:38.603" v="4343" actId="1037"/>
-          <ac:spMkLst>
-            <pc:docMk/>
-            <pc:sldMk cId="436543705" sldId="817"/>
-            <ac:spMk id="16" creationId="{FC91C62F-544E-446B-5E37-EBD8C0F26C5E}"/>
-          </ac:spMkLst>
-        </pc:spChg>
-        <pc:spChg chg="add mod">
-          <ac:chgData name="Zonghua Gu" userId="9a7e1853e1951ef5" providerId="LiveId" clId="{CF1FAA12-072C-4ED5-BA76-0FFFAEFDB88A}" dt="2025-12-03T01:48:42.495" v="4868" actId="1076"/>
-          <ac:spMkLst>
-            <pc:docMk/>
-            <pc:sldMk cId="436543705" sldId="817"/>
-            <ac:spMk id="20" creationId="{6A32EAF7-51C8-6C8C-E34F-3D982CFA9042}"/>
-          </ac:spMkLst>
-        </pc:spChg>
-        <pc:graphicFrameChg chg="mod">
-          <ac:chgData name="Zonghua Gu" userId="9a7e1853e1951ef5" providerId="LiveId" clId="{CF1FAA12-072C-4ED5-BA76-0FFFAEFDB88A}" dt="2025-12-03T01:48:40.217" v="4867" actId="1076"/>
-          <ac:graphicFrameMkLst>
-            <pc:docMk/>
-            <pc:sldMk cId="436543705" sldId="817"/>
-            <ac:graphicFrameMk id="7" creationId="{34E32F45-A466-4D81-2CAD-4DBC2C6742BC}"/>
-          </ac:graphicFrameMkLst>
-        </pc:graphicFrameChg>
-        <pc:graphicFrameChg chg="mod modGraphic">
-          <ac:chgData name="Zonghua Gu" userId="9a7e1853e1951ef5" providerId="LiveId" clId="{CF1FAA12-072C-4ED5-BA76-0FFFAEFDB88A}" dt="2025-12-03T01:57:19.678" v="4873" actId="207"/>
-          <ac:graphicFrameMkLst>
-            <pc:docMk/>
-            <pc:sldMk cId="436543705" sldId="817"/>
-            <ac:graphicFrameMk id="8" creationId="{9770AA11-4F5C-66E5-32E6-746A87733451}"/>
-          </ac:graphicFrameMkLst>
-        </pc:graphicFrameChg>
-        <pc:cxnChg chg="add mod">
-          <ac:chgData name="Zonghua Gu" userId="9a7e1853e1951ef5" providerId="LiveId" clId="{CF1FAA12-072C-4ED5-BA76-0FFFAEFDB88A}" dt="2025-12-03T00:17:23.412" v="4288" actId="1076"/>
-          <ac:cxnSpMkLst>
-            <pc:docMk/>
-            <pc:sldMk cId="436543705" sldId="817"/>
-            <ac:cxnSpMk id="10" creationId="{83A70247-FCDE-B34D-0418-AD0E73C544B3}"/>
-          </ac:cxnSpMkLst>
-        </pc:cxnChg>
-        <pc:cxnChg chg="add mod">
-          <ac:chgData name="Zonghua Gu" userId="9a7e1853e1951ef5" providerId="LiveId" clId="{CF1FAA12-072C-4ED5-BA76-0FFFAEFDB88A}" dt="2025-12-03T00:18:18.731" v="4317" actId="14100"/>
-          <ac:cxnSpMkLst>
-            <pc:docMk/>
-            <pc:sldMk cId="436543705" sldId="817"/>
-            <ac:cxnSpMk id="17" creationId="{98C581BD-5415-4240-5CDE-EE805D176DFD}"/>
-          </ac:cxnSpMkLst>
-        </pc:cxnChg>
-        <pc:cxnChg chg="add mod">
-          <ac:chgData name="Zonghua Gu" userId="9a7e1853e1951ef5" providerId="LiveId" clId="{CF1FAA12-072C-4ED5-BA76-0FFFAEFDB88A}" dt="2025-12-03T00:18:59.072" v="4330" actId="1076"/>
-          <ac:cxnSpMkLst>
-            <pc:docMk/>
-            <pc:sldMk cId="436543705" sldId="817"/>
-            <ac:cxnSpMk id="21" creationId="{50BCB6B3-8463-2EB8-C9F4-91B6D04C1A17}"/>
-          </ac:cxnSpMkLst>
-        </pc:cxnChg>
       </pc:sldChg>
-      <pc:sldChg chg="modSp del mod">
-        <pc:chgData name="Zonghua Gu" userId="9a7e1853e1951ef5" providerId="LiveId" clId="{CF1FAA12-072C-4ED5-BA76-0FFFAEFDB88A}" dt="2025-12-03T00:54:50.240" v="4439" actId="2696"/>
-        <pc:sldMkLst>
-          <pc:docMk/>
-          <pc:sldMk cId="1762553256" sldId="818"/>
-        </pc:sldMkLst>
-        <pc:spChg chg="mod">
-          <ac:chgData name="Zonghua Gu" userId="9a7e1853e1951ef5" providerId="LiveId" clId="{CF1FAA12-072C-4ED5-BA76-0FFFAEFDB88A}" dt="2025-12-03T00:54:33.958" v="4438" actId="207"/>
-          <ac:spMkLst>
-            <pc:docMk/>
-            <pc:sldMk cId="1762553256" sldId="818"/>
-            <ac:spMk id="4" creationId="{3DC23136-53FC-2BF5-8C7C-A3096D3761E3}"/>
-          </ac:spMkLst>
-        </pc:spChg>
-        <pc:spChg chg="mod">
-          <ac:chgData name="Zonghua Gu" userId="9a7e1853e1951ef5" providerId="LiveId" clId="{CF1FAA12-072C-4ED5-BA76-0FFFAEFDB88A}" dt="2025-12-03T00:54:09.365" v="4433" actId="20577"/>
-          <ac:spMkLst>
-            <pc:docMk/>
-            <pc:sldMk cId="1762553256" sldId="818"/>
-            <ac:spMk id="5" creationId="{080C4AE5-B126-9162-362F-24C26D91D6E5}"/>
-          </ac:spMkLst>
-        </pc:spChg>
-      </pc:sldChg>
-      <pc:sldChg chg="add">
-        <pc:chgData name="Zonghua Gu" userId="9a7e1853e1951ef5" providerId="LiveId" clId="{CF1FAA12-072C-4ED5-BA76-0FFFAEFDB88A}" dt="2025-12-03T01:45:44.565" v="4772"/>
+      <pc:sldChg chg="del">
+        <pc:chgData name="Zonghua Gu" userId="9a7e1853e1951ef5" providerId="LiveId" clId="{CF1FAA12-072C-4ED5-BA76-0FFFAEFDB88A}" dt="2026-04-23T15:02:50.637" v="4896" actId="2696"/>
         <pc:sldMkLst>
           <pc:docMk/>
           <pc:sldMk cId="1829076800" sldId="818"/>
         </pc:sldMkLst>
       </pc:sldChg>
-      <pc:sldChg chg="add del">
-        <pc:chgData name="Zonghua Gu" userId="9a7e1853e1951ef5" providerId="LiveId" clId="{CF1FAA12-072C-4ED5-BA76-0FFFAEFDB88A}" dt="2025-12-03T01:45:39.993" v="4771" actId="2696"/>
+      <pc:sldChg chg="add">
+        <pc:chgData name="Zonghua Gu" userId="9a7e1853e1951ef5" providerId="LiveId" clId="{CF1FAA12-072C-4ED5-BA76-0FFFAEFDB88A}" dt="2026-04-23T15:02:55.362" v="4897"/>
         <pc:sldMkLst>
           <pc:docMk/>
-          <pc:sldMk cId="3867596834" sldId="818"/>
-        </pc:sldMkLst>
-      </pc:sldChg>
-      <pc:sldChg chg="add del">
-        <pc:chgData name="Zonghua Gu" userId="9a7e1853e1951ef5" providerId="LiveId" clId="{CF1FAA12-072C-4ED5-BA76-0FFFAEFDB88A}" dt="2025-12-03T01:45:39.993" v="4771" actId="2696"/>
-        <pc:sldMkLst>
-          <pc:docMk/>
-          <pc:sldMk cId="698050531" sldId="819"/>
+          <pc:sldMk cId="3372098353" sldId="818"/>
         </pc:sldMkLst>
       </pc:sldChg>
       <pc:sldChg chg="add">
-        <pc:chgData name="Zonghua Gu" userId="9a7e1853e1951ef5" providerId="LiveId" clId="{CF1FAA12-072C-4ED5-BA76-0FFFAEFDB88A}" dt="2025-12-03T01:45:44.565" v="4772"/>
+        <pc:chgData name="Zonghua Gu" userId="9a7e1853e1951ef5" providerId="LiveId" clId="{CF1FAA12-072C-4ED5-BA76-0FFFAEFDB88A}" dt="2026-04-23T15:02:55.362" v="4897"/>
+        <pc:sldMkLst>
+          <pc:docMk/>
+          <pc:sldMk cId="1011627645" sldId="819"/>
+        </pc:sldMkLst>
+      </pc:sldChg>
+      <pc:sldChg chg="del">
+        <pc:chgData name="Zonghua Gu" userId="9a7e1853e1951ef5" providerId="LiveId" clId="{CF1FAA12-072C-4ED5-BA76-0FFFAEFDB88A}" dt="2026-04-23T15:02:50.637" v="4896" actId="2696"/>
         <pc:sldMkLst>
           <pc:docMk/>
           <pc:sldMk cId="2287290416" sldId="819"/>
         </pc:sldMkLst>
       </pc:sldChg>
-      <pc:sldChg chg="modSp del mod">
-        <pc:chgData name="Zonghua Gu" userId="9a7e1853e1951ef5" providerId="LiveId" clId="{CF1FAA12-072C-4ED5-BA76-0FFFAEFDB88A}" dt="2025-12-03T00:54:50.240" v="4439" actId="2696"/>
+      <pc:sldChg chg="add">
+        <pc:chgData name="Zonghua Gu" userId="9a7e1853e1951ef5" providerId="LiveId" clId="{CF1FAA12-072C-4ED5-BA76-0FFFAEFDB88A}" dt="2026-04-23T15:02:55.362" v="4897"/>
         <pc:sldMkLst>
           <pc:docMk/>
-          <pc:sldMk cId="4286255382" sldId="819"/>
-        </pc:sldMkLst>
-        <pc:spChg chg="mod">
-          <ac:chgData name="Zonghua Gu" userId="9a7e1853e1951ef5" providerId="LiveId" clId="{CF1FAA12-072C-4ED5-BA76-0FFFAEFDB88A}" dt="2025-12-03T00:28:54.368" v="4393" actId="1036"/>
-          <ac:spMkLst>
-            <pc:docMk/>
-            <pc:sldMk cId="4286255382" sldId="819"/>
-            <ac:spMk id="5" creationId="{667005E6-B78A-DE6F-E3EA-2180A0B55757}"/>
-          </ac:spMkLst>
-        </pc:spChg>
-      </pc:sldChg>
-      <pc:sldChg chg="add del">
-        <pc:chgData name="Zonghua Gu" userId="9a7e1853e1951ef5" providerId="LiveId" clId="{CF1FAA12-072C-4ED5-BA76-0FFFAEFDB88A}" dt="2025-12-03T01:45:39.993" v="4771" actId="2696"/>
-        <pc:sldMkLst>
-          <pc:docMk/>
-          <pc:sldMk cId="1237979943" sldId="820"/>
+          <pc:sldMk cId="150664292" sldId="820"/>
         </pc:sldMkLst>
       </pc:sldChg>
-      <pc:sldChg chg="add">
-        <pc:chgData name="Zonghua Gu" userId="9a7e1853e1951ef5" providerId="LiveId" clId="{CF1FAA12-072C-4ED5-BA76-0FFFAEFDB88A}" dt="2025-12-03T01:45:44.565" v="4772"/>
+      <pc:sldChg chg="del">
+        <pc:chgData name="Zonghua Gu" userId="9a7e1853e1951ef5" providerId="LiveId" clId="{CF1FAA12-072C-4ED5-BA76-0FFFAEFDB88A}" dt="2026-04-23T15:02:50.637" v="4896" actId="2696"/>
         <pc:sldMkLst>
           <pc:docMk/>
           <pc:sldMk cId="1555766300" sldId="820"/>
         </pc:sldMkLst>
-      </pc:sldChg>
-      <pc:sldChg chg="del">
-        <pc:chgData name="Zonghua Gu" userId="9a7e1853e1951ef5" providerId="LiveId" clId="{CF1FAA12-072C-4ED5-BA76-0FFFAEFDB88A}" dt="2025-12-03T00:54:50.240" v="4439" actId="2696"/>
-        <pc:sldMkLst>
-          <pc:docMk/>
-          <pc:sldMk cId="1599510770" sldId="820"/>
-        </pc:sldMkLst>
-      </pc:sldChg>
-      <pc:sldChg chg="modSp new mod ord">
-        <pc:chgData name="Zonghua Gu" userId="9a7e1853e1951ef5" providerId="LiveId" clId="{CF1FAA12-072C-4ED5-BA76-0FFFAEFDB88A}" dt="2025-12-03T01:47:40.611" v="4862" actId="122"/>
-        <pc:sldMkLst>
-          <pc:docMk/>
-          <pc:sldMk cId="780454370" sldId="821"/>
-        </pc:sldMkLst>
-        <pc:spChg chg="mod">
-          <ac:chgData name="Zonghua Gu" userId="9a7e1853e1951ef5" providerId="LiveId" clId="{CF1FAA12-072C-4ED5-BA76-0FFFAEFDB88A}" dt="2025-12-03T01:47:40.611" v="4862" actId="122"/>
-          <ac:spMkLst>
-            <pc:docMk/>
-            <pc:sldMk cId="780454370" sldId="821"/>
-            <ac:spMk id="2" creationId="{2D6E065B-6E1F-B821-412C-FD0AA6D6FFAC}"/>
-          </ac:spMkLst>
-        </pc:spChg>
-        <pc:spChg chg="mod">
-          <ac:chgData name="Zonghua Gu" userId="9a7e1853e1951ef5" providerId="LiveId" clId="{CF1FAA12-072C-4ED5-BA76-0FFFAEFDB88A}" dt="2025-12-03T01:46:57.893" v="4860" actId="207"/>
-          <ac:spMkLst>
-            <pc:docMk/>
-            <pc:sldMk cId="780454370" sldId="821"/>
-            <ac:spMk id="4" creationId="{0C9C6FA3-D066-E5DA-E405-23B7F5B00998}"/>
-          </ac:spMkLst>
-        </pc:spChg>
       </pc:sldChg>
     </pc:docChg>
   </pc:docChgLst>
@@ -667,7 +338,7 @@
           <a:p>
             <a:fld id="{3B161579-C726-4AFD-89FC-66D961EAF8EA}" type="datetimeFigureOut">
               <a:rPr lang="en-US" smtClean="0"/>
-              <a:t>12/2/2025</a:t>
+              <a:t>4/23/2026</a:t>
             </a:fld>
             <a:endParaRPr lang="en-US"/>
           </a:p>
@@ -845,7 +516,7 @@
             <a:fld id="{0C5DCA7A-C3FD-4606-A3AD-864BD96433D4}" type="datetimeFigureOut">
               <a:rPr lang="en-US" smtClean="0"/>
               <a:pPr/>
-              <a:t>12/2/2025</a:t>
+              <a:t>4/23/2026</a:t>
             </a:fld>
             <a:endParaRPr lang="en-US"/>
           </a:p>
@@ -2852,7 +2523,7 @@
             <a:fld id="{D46F4F04-2BB1-473A-9274-1B455085D21A}" type="slidenum">
               <a:rPr lang="en-US" smtClean="0"/>
               <a:pPr/>
-              <a:t>27</a:t>
+              <a:t>30</a:t>
             </a:fld>
             <a:endParaRPr lang="en-US"/>
           </a:p>
@@ -2960,7 +2631,7 @@
             <a:fld id="{D46F4F04-2BB1-473A-9274-1B455085D21A}" type="slidenum">
               <a:rPr lang="en-US" smtClean="0"/>
               <a:pPr/>
-              <a:t>28</a:t>
+              <a:t>31</a:t>
             </a:fld>
             <a:endParaRPr lang="en-US"/>
           </a:p>
@@ -3076,7 +2747,7 @@
             <a:fld id="{D46F4F04-2BB1-473A-9274-1B455085D21A}" type="slidenum">
               <a:rPr lang="en-US" smtClean="0"/>
               <a:pPr/>
-              <a:t>32</a:t>
+              <a:t>35</a:t>
             </a:fld>
             <a:endParaRPr lang="en-US"/>
           </a:p>
@@ -3237,7 +2908,7 @@
             <a:pPr eaLnBrk="1" latinLnBrk="0" hangingPunct="1"/>
             <a:fld id="{7966D375-7FE4-4861-9EA3-8493E3E81506}" type="datetime1">
               <a:rPr lang="en-US" smtClean="0"/>
-              <a:t>12/2/2025</a:t>
+              <a:t>4/23/2026</a:t>
             </a:fld>
             <a:endParaRPr lang="en-US" sz="1600" dirty="0"/>
           </a:p>
@@ -3597,7 +3268,7 @@
             <a:pPr eaLnBrk="1" latinLnBrk="0" hangingPunct="1"/>
             <a:fld id="{A9C54BE0-D5FE-4C7B-88A7-8835FDA599B1}" type="datetime1">
               <a:rPr lang="en-US" smtClean="0"/>
-              <a:t>12/2/2025</a:t>
+              <a:t>4/23/2026</a:t>
             </a:fld>
             <a:endParaRPr lang="en-US"/>
           </a:p>
@@ -3773,7 +3444,7 @@
             <a:pPr eaLnBrk="1" latinLnBrk="0" hangingPunct="1"/>
             <a:fld id="{F132153C-039A-48A4-AC9F-CEC24D5C2B7A}" type="datetime1">
               <a:rPr lang="en-US" smtClean="0"/>
-              <a:t>12/2/2025</a:t>
+              <a:t>4/23/2026</a:t>
             </a:fld>
             <a:endParaRPr lang="en-US"/>
           </a:p>
@@ -4240,7 +3911,7 @@
             <a:fld id="{DFAD6F50-E977-4162-8DF4-4DA1E6F19796}" type="datetime1">
               <a:rPr lang="en-US" smtClean="0"/>
               <a:pPr eaLnBrk="1" latinLnBrk="0" hangingPunct="1"/>
-              <a:t>12/2/2025</a:t>
+              <a:t>4/23/2026</a:t>
             </a:fld>
             <a:endParaRPr lang="en-US" sz="1200" dirty="0"/>
           </a:p>
@@ -4554,7 +4225,7 @@
             <a:fld id="{42A4D53F-573F-4718-BBA0-A86965028093}" type="datetime1">
               <a:rPr lang="en-US" smtClean="0"/>
               <a:pPr eaLnBrk="1" latinLnBrk="0" hangingPunct="1"/>
-              <a:t>12/2/2025</a:t>
+              <a:t>4/23/2026</a:t>
             </a:fld>
             <a:endParaRPr lang="en-US" dirty="0"/>
           </a:p>
@@ -4830,7 +4501,7 @@
             <a:fld id="{C9B206E1-2545-4E30-92FD-1E4787463A36}" type="datetime1">
               <a:rPr lang="en-US" smtClean="0"/>
               <a:pPr eaLnBrk="1" latinLnBrk="0" hangingPunct="1"/>
-              <a:t>12/2/2025</a:t>
+              <a:t>4/23/2026</a:t>
             </a:fld>
             <a:endParaRPr lang="en-US" dirty="0"/>
           </a:p>
@@ -5057,7 +4728,7 @@
             <a:fld id="{BD37D9B0-1E14-464D-94B0-F2A8C2E324E7}" type="datetime1">
               <a:rPr lang="en-US" smtClean="0"/>
               <a:pPr eaLnBrk="1" latinLnBrk="0" hangingPunct="1"/>
-              <a:t>12/2/2025</a:t>
+              <a:t>4/23/2026</a:t>
             </a:fld>
             <a:endParaRPr lang="en-US"/>
           </a:p>
@@ -5416,7 +5087,7 @@
             <a:fld id="{17A47E1E-3281-48F5-9487-561BBC0DE61A}" type="datetime1">
               <a:rPr lang="en-US" smtClean="0"/>
               <a:pPr eaLnBrk="1" latinLnBrk="0" hangingPunct="1"/>
-              <a:t>12/2/2025</a:t>
+              <a:t>4/23/2026</a:t>
             </a:fld>
             <a:endParaRPr lang="en-US"/>
           </a:p>
@@ -5655,7 +5326,7 @@
             <a:fld id="{457778AC-3F47-4322-9871-235CA71C9FB7}" type="datetime1">
               <a:rPr lang="en-US" smtClean="0"/>
               <a:pPr eaLnBrk="1" latinLnBrk="0" hangingPunct="1"/>
-              <a:t>12/2/2025</a:t>
+              <a:t>4/23/2026</a:t>
             </a:fld>
             <a:endParaRPr lang="en-US"/>
           </a:p>
@@ -5803,7 +5474,7 @@
             <a:fld id="{8FC852DA-BC9D-4962-84E0-49DDC95967D0}" type="datetime1">
               <a:rPr lang="en-US" smtClean="0"/>
               <a:pPr eaLnBrk="1" latinLnBrk="0" hangingPunct="1"/>
-              <a:t>12/2/2025</a:t>
+              <a:t>4/23/2026</a:t>
             </a:fld>
             <a:endParaRPr lang="en-US"/>
           </a:p>
@@ -6008,7 +5679,7 @@
             <a:pPr eaLnBrk="1" latinLnBrk="0" hangingPunct="1"/>
             <a:fld id="{00065D69-4622-413E-9E09-6A2509001B66}" type="datetime1">
               <a:rPr lang="en-US" smtClean="0"/>
-              <a:t>12/2/2025</a:t>
+              <a:t>4/23/2026</a:t>
             </a:fld>
             <a:endParaRPr lang="en-US" dirty="0"/>
           </a:p>
@@ -6258,7 +5929,7 @@
             <a:fld id="{BD8CDB30-0989-475F-BD84-F28125E3B4A3}" type="datetime1">
               <a:rPr lang="en-US" smtClean="0"/>
               <a:pPr eaLnBrk="1" latinLnBrk="0" hangingPunct="1"/>
-              <a:t>12/2/2025</a:t>
+              <a:t>4/23/2026</a:t>
             </a:fld>
             <a:endParaRPr lang="en-US"/>
           </a:p>
@@ -6672,7 +6343,7 @@
             <a:fld id="{3D268D79-62AD-4C50-8718-03ED52036E43}" type="datetime1">
               <a:rPr lang="en-US" smtClean="0"/>
               <a:pPr eaLnBrk="1" latinLnBrk="0" hangingPunct="1"/>
-              <a:t>12/2/2025</a:t>
+              <a:t>4/23/2026</a:t>
             </a:fld>
             <a:endParaRPr lang="en-US"/>
           </a:p>
@@ -6976,7 +6647,7 @@
             <a:fld id="{362A8F80-F1FC-4E19-AF0E-2AEA7F0226D7}" type="datetime1">
               <a:rPr lang="en-US" smtClean="0"/>
               <a:pPr eaLnBrk="1" latinLnBrk="0" hangingPunct="1"/>
-              <a:t>12/2/2025</a:t>
+              <a:t>4/23/2026</a:t>
             </a:fld>
             <a:endParaRPr lang="en-US"/>
           </a:p>
@@ -7158,7 +6829,7 @@
             <a:fld id="{84EF3758-DF7B-4347-89DE-ED0416D762CD}" type="datetime1">
               <a:rPr lang="en-US" smtClean="0"/>
               <a:pPr eaLnBrk="1" latinLnBrk="0" hangingPunct="1"/>
-              <a:t>12/2/2025</a:t>
+              <a:t>4/23/2026</a:t>
             </a:fld>
             <a:endParaRPr lang="en-US"/>
           </a:p>
@@ -7498,7 +7169,7 @@
             <a:pPr eaLnBrk="1" latinLnBrk="0" hangingPunct="1"/>
             <a:fld id="{26D84756-85D3-4017-90AB-B482945A0CB0}" type="datetime1">
               <a:rPr lang="en-US" smtClean="0"/>
-              <a:t>12/2/2025</a:t>
+              <a:t>4/23/2026</a:t>
             </a:fld>
             <a:endParaRPr lang="en-US" dirty="0"/>
           </a:p>
@@ -7719,7 +7390,7 @@
             <a:pPr eaLnBrk="1" latinLnBrk="0" hangingPunct="1"/>
             <a:fld id="{1359E9A9-3822-4D57-8A64-831B26641011}" type="datetime1">
               <a:rPr lang="en-US" smtClean="0"/>
-              <a:t>12/2/2025</a:t>
+              <a:t>4/23/2026</a:t>
             </a:fld>
             <a:endParaRPr lang="en-US"/>
           </a:p>
@@ -8072,7 +7743,7 @@
             <a:pPr eaLnBrk="1" latinLnBrk="0" hangingPunct="1"/>
             <a:fld id="{F96C45A0-00E6-4B4B-A1A7-CF1486D67AF4}" type="datetime1">
               <a:rPr lang="en-US" smtClean="0"/>
-              <a:t>12/2/2025</a:t>
+              <a:t>4/23/2026</a:t>
             </a:fld>
             <a:endParaRPr lang="en-US"/>
           </a:p>
@@ -8305,7 +7976,7 @@
             <a:pPr eaLnBrk="1" latinLnBrk="0" hangingPunct="1"/>
             <a:fld id="{B88C3861-EF45-4815-A76E-294671FAB405}" type="datetime1">
               <a:rPr lang="en-US" smtClean="0"/>
-              <a:t>12/2/2025</a:t>
+              <a:t>4/23/2026</a:t>
             </a:fld>
             <a:endParaRPr lang="en-US"/>
           </a:p>
@@ -8447,7 +8118,7 @@
             <a:pPr eaLnBrk="1" latinLnBrk="0" hangingPunct="1"/>
             <a:fld id="{0F0B8080-ED7A-45A9-A704-76D750342F93}" type="datetime1">
               <a:rPr lang="en-US" smtClean="0"/>
-              <a:t>12/2/2025</a:t>
+              <a:t>4/23/2026</a:t>
             </a:fld>
             <a:endParaRPr lang="en-US"/>
           </a:p>
@@ -8725,7 +8396,7 @@
             <a:pPr eaLnBrk="1" latinLnBrk="0" hangingPunct="1"/>
             <a:fld id="{D1503A19-0780-4B28-9CCB-B5B1820188BD}" type="datetime1">
               <a:rPr lang="en-US" smtClean="0"/>
-              <a:t>12/2/2025</a:t>
+              <a:t>4/23/2026</a:t>
             </a:fld>
             <a:endParaRPr lang="en-US"/>
           </a:p>
@@ -9133,7 +8804,7 @@
             <a:pPr eaLnBrk="1" latinLnBrk="0" hangingPunct="1"/>
             <a:fld id="{2142A9E5-AE71-46A9-A65E-9BA279401128}" type="datetime1">
               <a:rPr lang="en-US" smtClean="0"/>
-              <a:t>12/2/2025</a:t>
+              <a:t>4/23/2026</a:t>
             </a:fld>
             <a:endParaRPr lang="en-US"/>
           </a:p>
@@ -9471,7 +9142,7 @@
             <a:pPr eaLnBrk="1" latinLnBrk="0" hangingPunct="1"/>
             <a:fld id="{4087DD3F-948A-46ED-B3EC-5D68A963D0B7}" type="datetime1">
               <a:rPr lang="en-US" smtClean="0"/>
-              <a:t>12/2/2025</a:t>
+              <a:t>4/23/2026</a:t>
             </a:fld>
             <a:endParaRPr lang="en-US" sz="1400" dirty="0">
               <a:solidFill>
@@ -10152,7 +9823,7 @@
             <a:fld id="{A1DC5B07-A42E-4D40-A069-384595D56939}" type="datetime1">
               <a:rPr lang="en-US" smtClean="0"/>
               <a:pPr eaLnBrk="1" latinLnBrk="0" hangingPunct="1"/>
-              <a:t>12/2/2025</a:t>
+              <a:t>4/23/2026</a:t>
             </a:fld>
             <a:endParaRPr lang="en-US" sz="1050" dirty="0">
               <a:solidFill>
@@ -16527,7 +16198,7 @@
             </a:r>
             <a:r>
               <a:rPr lang="en-US" sz="2000" dirty="0"/>
-              <a:t>= 0x100001F8. Each PUSH is:</a:t>
+              <a:t>= 0x10000200 – 8 = 0x100001F8. Each PUSH is:</a:t>
             </a:r>
             <a:endParaRPr lang="en-US" sz="2000" b="0" dirty="0"/>
           </a:p>
@@ -16557,7 +16228,7 @@
             </a:r>
             <a:r>
               <a:rPr lang="en-US" sz="2000" dirty="0"/>
-              <a:t>, SP = 0x100001FC:</a:t>
+              <a:t>, SP = 0x100001F8 + 4 = 0x100001FC:</a:t>
             </a:r>
             <a:endParaRPr lang="en-US" sz="2000" b="0" dirty="0"/>
           </a:p>
@@ -26592,7 +26263,7 @@
           <p:cNvPr id="2" name="Title 1">
             <a:extLst>
               <a:ext uri="{FF2B5EF4-FFF2-40B4-BE49-F238E27FC236}">
-                <a16:creationId xmlns:a16="http://schemas.microsoft.com/office/drawing/2014/main" id="{2D6E065B-6E1F-B821-412C-FD0AA6D6FFAC}"/>
+                <a16:creationId xmlns:a16="http://schemas.microsoft.com/office/drawing/2014/main" id="{6234EC6E-B891-AF83-E66F-8217385C54F6}"/>
               </a:ext>
             </a:extLst>
           </p:cNvPr>
@@ -26608,14 +26279,9 @@
           <a:bodyPr/>
           <a:lstStyle/>
           <a:p>
-            <a:pPr algn="ctr"/>
-            <a:r>
-              <a:rPr lang="en-US" dirty="0">
-                <a:solidFill>
-                  <a:srgbClr val="C00000"/>
-                </a:solidFill>
-              </a:rPr>
-              <a:t>Separator Page</a:t>
+            <a:r>
+              <a:rPr lang="en-US" dirty="0"/>
+              <a:t>Program Understanding</a:t>
             </a:r>
           </a:p>
         </p:txBody>
@@ -26625,7 +26291,7 @@
           <p:cNvPr id="3" name="Slide Number Placeholder 2">
             <a:extLst>
               <a:ext uri="{FF2B5EF4-FFF2-40B4-BE49-F238E27FC236}">
-                <a16:creationId xmlns:a16="http://schemas.microsoft.com/office/drawing/2014/main" id="{AD736B6C-17FB-16E1-408B-AB3C19FF2650}"/>
+                <a16:creationId xmlns:a16="http://schemas.microsoft.com/office/drawing/2014/main" id="{5959EC02-DF33-1CB3-210F-7D09C20A83C0}"/>
               </a:ext>
             </a:extLst>
           </p:cNvPr>
@@ -26655,7 +26321,7 @@
           <p:cNvPr id="4" name="Content Placeholder 3">
             <a:extLst>
               <a:ext uri="{FF2B5EF4-FFF2-40B4-BE49-F238E27FC236}">
-                <a16:creationId xmlns:a16="http://schemas.microsoft.com/office/drawing/2014/main" id="{0C9C6FA3-D066-E5DA-E405-23B7F5B00998}"/>
+                <a16:creationId xmlns:a16="http://schemas.microsoft.com/office/drawing/2014/main" id="{3DC23136-53FC-2BF5-8C7C-A3096D3761E3}"/>
               </a:ext>
             </a:extLst>
           </p:cNvPr>
@@ -26666,33 +26332,247 @@
             <p:ph sz="quarter" idx="1"/>
           </p:nvPr>
         </p:nvSpPr>
-        <p:spPr/>
+        <p:spPr>
+          <a:xfrm>
+            <a:off x="457200" y="1219200"/>
+            <a:ext cx="8229600" cy="1066800"/>
+          </a:xfrm>
+        </p:spPr>
         <p:txBody>
           <a:bodyPr>
-            <a:normAutofit/>
+            <a:normAutofit fontScale="70000" lnSpcReduction="20000"/>
           </a:bodyPr>
           <a:lstStyle/>
           <a:p>
             <a:r>
-              <a:rPr lang="en-US" altLang="zh-CN" sz="4000" dirty="0">
+              <a:rPr lang="en-US" dirty="0"/>
+              <a:t>Given the following code, fill in the blanks listed next to each instruction with the values that would be in each register or status bit </a:t>
+            </a:r>
+            <a:r>
+              <a:rPr lang="en-US" dirty="0">
                 <a:solidFill>
                   <a:srgbClr val="C00000"/>
                 </a:solidFill>
               </a:rPr>
-              <a:t>The following slides will not be covered in the exam</a:t>
-            </a:r>
-            <a:endParaRPr lang="en-US" sz="4000" dirty="0">
-              <a:solidFill>
-                <a:srgbClr val="C00000"/>
-              </a:solidFill>
+              <a:t>after each instruction executes</a:t>
+            </a:r>
+            <a:r>
+              <a:rPr lang="en-US" dirty="0"/>
+              <a:t>. Instruction addresses are given to the left of each assembly instruction (not part of the code).  Assume that SP = 0x10000200 at the start of the program.</a:t>
+            </a:r>
+          </a:p>
+        </p:txBody>
+      </p:sp>
+      <p:sp>
+        <p:nvSpPr>
+          <p:cNvPr id="5" name="TextBox 4">
+            <a:extLst>
+              <a:ext uri="{FF2B5EF4-FFF2-40B4-BE49-F238E27FC236}">
+                <a16:creationId xmlns:a16="http://schemas.microsoft.com/office/drawing/2014/main" id="{080C4AE5-B126-9162-362F-24C26D91D6E5}"/>
+              </a:ext>
+            </a:extLst>
+          </p:cNvPr>
+          <p:cNvSpPr txBox="1"/>
+          <p:nvPr/>
+        </p:nvSpPr>
+        <p:spPr>
+          <a:xfrm>
+            <a:off x="641001" y="2182128"/>
+            <a:ext cx="8350599" cy="4278094"/>
+          </a:xfrm>
+          <a:prstGeom prst="rect">
+            <a:avLst/>
+          </a:prstGeom>
+        </p:spPr>
+        <p:style>
+          <a:lnRef idx="2">
+            <a:schemeClr val="accent1"/>
+          </a:lnRef>
+          <a:fillRef idx="1">
+            <a:schemeClr val="lt1"/>
+          </a:fillRef>
+          <a:effectRef idx="0">
+            <a:schemeClr val="accent1"/>
+          </a:effectRef>
+          <a:fontRef idx="minor">
+            <a:schemeClr val="dk1"/>
+          </a:fontRef>
+        </p:style>
+        <p:txBody>
+          <a:bodyPr wrap="square" rtlCol="0">
+            <a:spAutoFit/>
+          </a:bodyPr>
+          <a:lstStyle/>
+          <a:p>
+            <a:r>
+              <a:rPr lang="en-US" sz="1600" dirty="0">
+                <a:latin typeface="Consolas" panose="020B0609020204030204" pitchFamily="49" charset="0"/>
+                <a:cs typeface="Consolas" panose="020B0609020204030204" pitchFamily="49" charset="0"/>
+              </a:rPr>
+              <a:t>          AREA </a:t>
+            </a:r>
+            <a:r>
+              <a:rPr lang="en-US" sz="1600" dirty="0" err="1">
+                <a:latin typeface="Consolas" panose="020B0609020204030204" pitchFamily="49" charset="0"/>
+                <a:cs typeface="Consolas" panose="020B0609020204030204" pitchFamily="49" charset="0"/>
+              </a:rPr>
+              <a:t>mycode</a:t>
+            </a:r>
+            <a:r>
+              <a:rPr lang="en-US" sz="1600" dirty="0">
+                <a:latin typeface="Consolas" panose="020B0609020204030204" pitchFamily="49" charset="0"/>
+                <a:cs typeface="Consolas" panose="020B0609020204030204" pitchFamily="49" charset="0"/>
+              </a:rPr>
+              <a:t>, CODE, READONLY</a:t>
+            </a:r>
+          </a:p>
+          <a:p>
+            <a:r>
+              <a:rPr lang="en-US" sz="1600" dirty="0">
+                <a:latin typeface="Consolas" panose="020B0609020204030204" pitchFamily="49" charset="0"/>
+                <a:cs typeface="Consolas" panose="020B0609020204030204" pitchFamily="49" charset="0"/>
+              </a:rPr>
+              <a:t>          EXPORT __main</a:t>
+            </a:r>
+          </a:p>
+          <a:p>
+            <a:r>
+              <a:rPr lang="en-US" sz="1600" dirty="0">
+                <a:latin typeface="Consolas" panose="020B0609020204030204" pitchFamily="49" charset="0"/>
+                <a:cs typeface="Consolas" panose="020B0609020204030204" pitchFamily="49" charset="0"/>
+              </a:rPr>
+              <a:t>__main    PROC</a:t>
+            </a:r>
+          </a:p>
+          <a:p>
+            <a:r>
+              <a:rPr lang="en-US" sz="1600" dirty="0">
+                <a:latin typeface="Consolas" panose="020B0609020204030204" pitchFamily="49" charset="0"/>
+                <a:cs typeface="Consolas" panose="020B0609020204030204" pitchFamily="49" charset="0"/>
+              </a:rPr>
+              <a:t>0x250     MOV R0, #5</a:t>
+            </a:r>
+          </a:p>
+          <a:p>
+            <a:r>
+              <a:rPr lang="en-US" sz="1600" dirty="0">
+                <a:latin typeface="Consolas" panose="020B0609020204030204" pitchFamily="49" charset="0"/>
+                <a:cs typeface="Consolas" panose="020B0609020204030204" pitchFamily="49" charset="0"/>
+              </a:rPr>
+              <a:t>0x254     MOV R1, #10</a:t>
+            </a:r>
+          </a:p>
+          <a:p>
+            <a:r>
+              <a:rPr lang="en-US" sz="1600" dirty="0">
+                <a:latin typeface="Consolas" panose="020B0609020204030204" pitchFamily="49" charset="0"/>
+                <a:cs typeface="Consolas" panose="020B0609020204030204" pitchFamily="49" charset="0"/>
+              </a:rPr>
+              <a:t>0x258     CMP R0, R1           ; NZCV = ______</a:t>
+            </a:r>
+          </a:p>
+          <a:p>
+            <a:r>
+              <a:rPr lang="en-US" sz="1600" dirty="0">
+                <a:latin typeface="Consolas" panose="020B0609020204030204" pitchFamily="49" charset="0"/>
+                <a:cs typeface="Consolas" panose="020B0609020204030204" pitchFamily="49" charset="0"/>
+              </a:rPr>
+              <a:t>0x25A     BGE loop             ; PC = ______(after this instruction)</a:t>
+            </a:r>
+          </a:p>
+          <a:p>
+            <a:r>
+              <a:rPr lang="en-US" sz="1600" dirty="0">
+                <a:latin typeface="Consolas" panose="020B0609020204030204" pitchFamily="49" charset="0"/>
+                <a:cs typeface="Consolas" panose="020B0609020204030204" pitchFamily="49" charset="0"/>
+              </a:rPr>
+              <a:t>0x25C     BL foo               ; LR = ______, PC = ____(after this inst.)</a:t>
+            </a:r>
+          </a:p>
+          <a:p>
+            <a:r>
+              <a:rPr lang="en-US" sz="1600" dirty="0">
+                <a:latin typeface="Consolas" panose="020B0609020204030204" pitchFamily="49" charset="0"/>
+                <a:cs typeface="Consolas" panose="020B0609020204030204" pitchFamily="49" charset="0"/>
+              </a:rPr>
+              <a:t>0x260 loop B loop</a:t>
+            </a:r>
+          </a:p>
+          <a:p>
+            <a:r>
+              <a:rPr lang="en-US" sz="1600" dirty="0">
+                <a:latin typeface="Consolas" panose="020B0609020204030204" pitchFamily="49" charset="0"/>
+                <a:cs typeface="Consolas" panose="020B0609020204030204" pitchFamily="49" charset="0"/>
+              </a:rPr>
+              <a:t>          ENDP</a:t>
+            </a:r>
+          </a:p>
+          <a:p>
+            <a:endParaRPr lang="en-US" sz="1600" dirty="0">
+              <a:latin typeface="Consolas" panose="020B0609020204030204" pitchFamily="49" charset="0"/>
+              <a:cs typeface="Consolas" panose="020B0609020204030204" pitchFamily="49" charset="0"/>
             </a:endParaRPr>
+          </a:p>
+          <a:p>
+            <a:r>
+              <a:rPr lang="en-US" sz="1600" dirty="0">
+                <a:latin typeface="Consolas" panose="020B0609020204030204" pitchFamily="49" charset="0"/>
+                <a:cs typeface="Consolas" panose="020B0609020204030204" pitchFamily="49" charset="0"/>
+              </a:rPr>
+              <a:t>foo       PROC</a:t>
+            </a:r>
+          </a:p>
+          <a:p>
+            <a:r>
+              <a:rPr lang="en-US" sz="1600" dirty="0">
+                <a:latin typeface="Consolas" panose="020B0609020204030204" pitchFamily="49" charset="0"/>
+                <a:cs typeface="Consolas" panose="020B0609020204030204" pitchFamily="49" charset="0"/>
+              </a:rPr>
+              <a:t>0x262     PUSH{R0, R1}         ; SP = ____________</a:t>
+            </a:r>
+          </a:p>
+          <a:p>
+            <a:r>
+              <a:rPr lang="en-US" sz="1600" dirty="0">
+                <a:latin typeface="Consolas" panose="020B0609020204030204" pitchFamily="49" charset="0"/>
+                <a:cs typeface="Consolas" panose="020B0609020204030204" pitchFamily="49" charset="0"/>
+              </a:rPr>
+              <a:t>0x264     POP{R1}</a:t>
+            </a:r>
+          </a:p>
+          <a:p>
+            <a:r>
+              <a:rPr lang="en-US" sz="1600" dirty="0">
+                <a:latin typeface="Consolas" panose="020B0609020204030204" pitchFamily="49" charset="0"/>
+                <a:cs typeface="Consolas" panose="020B0609020204030204" pitchFamily="49" charset="0"/>
+              </a:rPr>
+              <a:t>0x266     POP{R0}              ; R0 = __________, SP = ____________</a:t>
+            </a:r>
+          </a:p>
+          <a:p>
+            <a:r>
+              <a:rPr lang="en-US" sz="1600" dirty="0">
+                <a:latin typeface="Consolas" panose="020B0609020204030204" pitchFamily="49" charset="0"/>
+                <a:cs typeface="Consolas" panose="020B0609020204030204" pitchFamily="49" charset="0"/>
+              </a:rPr>
+              <a:t>0x268     BX LR                ; LR = ___________, PC = ____________</a:t>
+            </a:r>
+          </a:p>
+          <a:p>
+            <a:r>
+              <a:rPr lang="en-US" sz="1600" dirty="0">
+                <a:latin typeface="Consolas" panose="020B0609020204030204" pitchFamily="49" charset="0"/>
+                <a:cs typeface="Consolas" panose="020B0609020204030204" pitchFamily="49" charset="0"/>
+              </a:rPr>
+              <a:t>          ENDP</a:t>
+            </a:r>
           </a:p>
         </p:txBody>
       </p:sp>
     </p:spTree>
     <p:extLst>
       <p:ext uri="{BB962C8B-B14F-4D97-AF65-F5344CB8AC3E}">
-        <p14:creationId xmlns:p14="http://schemas.microsoft.com/office/powerpoint/2010/main" val="780454370"/>
+        <p14:creationId xmlns:p14="http://schemas.microsoft.com/office/powerpoint/2010/main" val="3372098353"/>
       </p:ext>
     </p:extLst>
   </p:cSld>
@@ -26703,6 +26583,357 @@
 </file>
 
 <file path=ppt/slides/slide26.xml><?xml version="1.0" encoding="utf-8"?>
+<p:sld xmlns:a="http://schemas.openxmlformats.org/drawingml/2006/main" xmlns:r="http://schemas.openxmlformats.org/officeDocument/2006/relationships" xmlns:p="http://schemas.openxmlformats.org/presentationml/2006/main">
+  <p:cSld>
+    <p:spTree>
+      <p:nvGrpSpPr>
+        <p:cNvPr id="1" name="">
+          <a:extLst>
+            <a:ext uri="{FF2B5EF4-FFF2-40B4-BE49-F238E27FC236}">
+              <a16:creationId xmlns:a16="http://schemas.microsoft.com/office/drawing/2014/main" id="{FC0EE055-2D92-9967-6D5A-5CAE67FAA979}"/>
+            </a:ext>
+          </a:extLst>
+        </p:cNvPr>
+        <p:cNvGrpSpPr/>
+        <p:nvPr/>
+      </p:nvGrpSpPr>
+      <p:grpSpPr>
+        <a:xfrm>
+          <a:off x="0" y="0"/>
+          <a:ext cx="0" cy="0"/>
+          <a:chOff x="0" y="0"/>
+          <a:chExt cx="0" cy="0"/>
+        </a:xfrm>
+      </p:grpSpPr>
+      <p:sp>
+        <p:nvSpPr>
+          <p:cNvPr id="2" name="Title 1">
+            <a:extLst>
+              <a:ext uri="{FF2B5EF4-FFF2-40B4-BE49-F238E27FC236}">
+                <a16:creationId xmlns:a16="http://schemas.microsoft.com/office/drawing/2014/main" id="{BBCA5A9E-A770-8E75-1A17-1AA527EAD98D}"/>
+              </a:ext>
+            </a:extLst>
+          </p:cNvPr>
+          <p:cNvSpPr>
+            <a:spLocks noGrp="1"/>
+          </p:cNvSpPr>
+          <p:nvPr>
+            <p:ph type="title"/>
+          </p:nvPr>
+        </p:nvSpPr>
+        <p:spPr/>
+        <p:txBody>
+          <a:bodyPr/>
+          <a:lstStyle/>
+          <a:p>
+            <a:r>
+              <a:rPr lang="en-US" dirty="0"/>
+              <a:t>Program Understanding ANS</a:t>
+            </a:r>
+          </a:p>
+        </p:txBody>
+      </p:sp>
+      <p:sp>
+        <p:nvSpPr>
+          <p:cNvPr id="3" name="Slide Number Placeholder 2">
+            <a:extLst>
+              <a:ext uri="{FF2B5EF4-FFF2-40B4-BE49-F238E27FC236}">
+                <a16:creationId xmlns:a16="http://schemas.microsoft.com/office/drawing/2014/main" id="{E6EB26F8-63B8-7FD8-7173-F712D1EEF322}"/>
+              </a:ext>
+            </a:extLst>
+          </p:cNvPr>
+          <p:cNvSpPr>
+            <a:spLocks noGrp="1"/>
+          </p:cNvSpPr>
+          <p:nvPr>
+            <p:ph type="sldNum" sz="quarter" idx="12"/>
+          </p:nvPr>
+        </p:nvSpPr>
+        <p:spPr/>
+        <p:txBody>
+          <a:bodyPr/>
+          <a:lstStyle/>
+          <a:p>
+            <a:fld id="{EA7C8D44-3667-46F6-9772-CC52308E2A7F}" type="slidenum">
+              <a:rPr kumimoji="0" lang="en-US" smtClean="0"/>
+              <a:pPr/>
+              <a:t>26</a:t>
+            </a:fld>
+            <a:endParaRPr kumimoji="0" lang="en-US" dirty="0"/>
+          </a:p>
+        </p:txBody>
+      </p:sp>
+      <p:sp>
+        <p:nvSpPr>
+          <p:cNvPr id="4" name="Content Placeholder 3">
+            <a:extLst>
+              <a:ext uri="{FF2B5EF4-FFF2-40B4-BE49-F238E27FC236}">
+                <a16:creationId xmlns:a16="http://schemas.microsoft.com/office/drawing/2014/main" id="{6887EA07-332E-3EE5-6B34-92FAAEF7BA60}"/>
+              </a:ext>
+            </a:extLst>
+          </p:cNvPr>
+          <p:cNvSpPr>
+            <a:spLocks noGrp="1"/>
+          </p:cNvSpPr>
+          <p:nvPr>
+            <p:ph sz="quarter" idx="1"/>
+          </p:nvPr>
+        </p:nvSpPr>
+        <p:spPr>
+          <a:xfrm>
+            <a:off x="457200" y="1219200"/>
+            <a:ext cx="8229600" cy="1066800"/>
+          </a:xfrm>
+        </p:spPr>
+        <p:txBody>
+          <a:bodyPr>
+            <a:normAutofit fontScale="70000" lnSpcReduction="20000"/>
+          </a:bodyPr>
+          <a:lstStyle/>
+          <a:p>
+            <a:r>
+              <a:rPr lang="en-US" dirty="0"/>
+              <a:t>Given the following code, fill in the blanks listed next to each instruction with the values that would be in each register or status bit after the instruction executes. Instruction addresses are given to the left of each assembly instruction (not part of the code).  Assume that SP = 0x10000200 at the start of the program.</a:t>
+            </a:r>
+          </a:p>
+        </p:txBody>
+      </p:sp>
+      <p:sp>
+        <p:nvSpPr>
+          <p:cNvPr id="5" name="TextBox 4">
+            <a:extLst>
+              <a:ext uri="{FF2B5EF4-FFF2-40B4-BE49-F238E27FC236}">
+                <a16:creationId xmlns:a16="http://schemas.microsoft.com/office/drawing/2014/main" id="{667005E6-B78A-DE6F-E3EA-2180A0B55757}"/>
+              </a:ext>
+            </a:extLst>
+          </p:cNvPr>
+          <p:cNvSpPr txBox="1"/>
+          <p:nvPr/>
+        </p:nvSpPr>
+        <p:spPr>
+          <a:xfrm>
+            <a:off x="304800" y="2122706"/>
+            <a:ext cx="8534400" cy="4278094"/>
+          </a:xfrm>
+          <a:prstGeom prst="rect">
+            <a:avLst/>
+          </a:prstGeom>
+        </p:spPr>
+        <p:style>
+          <a:lnRef idx="2">
+            <a:schemeClr val="accent1"/>
+          </a:lnRef>
+          <a:fillRef idx="1">
+            <a:schemeClr val="lt1"/>
+          </a:fillRef>
+          <a:effectRef idx="0">
+            <a:schemeClr val="accent1"/>
+          </a:effectRef>
+          <a:fontRef idx="minor">
+            <a:schemeClr val="dk1"/>
+          </a:fontRef>
+        </p:style>
+        <p:txBody>
+          <a:bodyPr wrap="square" rtlCol="0">
+            <a:spAutoFit/>
+          </a:bodyPr>
+          <a:lstStyle/>
+          <a:p>
+            <a:r>
+              <a:rPr lang="en-US" sz="1600" dirty="0">
+                <a:latin typeface="Consolas" panose="020B0609020204030204" pitchFamily="49" charset="0"/>
+                <a:cs typeface="Consolas" panose="020B0609020204030204" pitchFamily="49" charset="0"/>
+              </a:rPr>
+              <a:t>          AREA </a:t>
+            </a:r>
+            <a:r>
+              <a:rPr lang="en-US" sz="1600" dirty="0" err="1">
+                <a:latin typeface="Consolas" panose="020B0609020204030204" pitchFamily="49" charset="0"/>
+                <a:cs typeface="Consolas" panose="020B0609020204030204" pitchFamily="49" charset="0"/>
+              </a:rPr>
+              <a:t>mycode</a:t>
+            </a:r>
+            <a:r>
+              <a:rPr lang="en-US" sz="1600" dirty="0">
+                <a:latin typeface="Consolas" panose="020B0609020204030204" pitchFamily="49" charset="0"/>
+                <a:cs typeface="Consolas" panose="020B0609020204030204" pitchFamily="49" charset="0"/>
+              </a:rPr>
+              <a:t>, CODE, READONLY</a:t>
+            </a:r>
+          </a:p>
+          <a:p>
+            <a:r>
+              <a:rPr lang="en-US" sz="1600" dirty="0">
+                <a:latin typeface="Consolas" panose="020B0609020204030204" pitchFamily="49" charset="0"/>
+                <a:cs typeface="Consolas" panose="020B0609020204030204" pitchFamily="49" charset="0"/>
+              </a:rPr>
+              <a:t>          EXPORT __main</a:t>
+            </a:r>
+          </a:p>
+          <a:p>
+            <a:r>
+              <a:rPr lang="en-US" sz="1600" dirty="0">
+                <a:latin typeface="Consolas" panose="020B0609020204030204" pitchFamily="49" charset="0"/>
+                <a:cs typeface="Consolas" panose="020B0609020204030204" pitchFamily="49" charset="0"/>
+              </a:rPr>
+              <a:t>__main    PROC</a:t>
+            </a:r>
+          </a:p>
+          <a:p>
+            <a:r>
+              <a:rPr lang="en-US" sz="1600" dirty="0">
+                <a:latin typeface="Consolas" panose="020B0609020204030204" pitchFamily="49" charset="0"/>
+                <a:cs typeface="Consolas" panose="020B0609020204030204" pitchFamily="49" charset="0"/>
+              </a:rPr>
+              <a:t>0x250     MOV R0, #5</a:t>
+            </a:r>
+          </a:p>
+          <a:p>
+            <a:r>
+              <a:rPr lang="en-US" sz="1600" dirty="0">
+                <a:latin typeface="Consolas" panose="020B0609020204030204" pitchFamily="49" charset="0"/>
+                <a:cs typeface="Consolas" panose="020B0609020204030204" pitchFamily="49" charset="0"/>
+              </a:rPr>
+              <a:t>0x254     MOV R1, #10</a:t>
+            </a:r>
+          </a:p>
+          <a:p>
+            <a:r>
+              <a:rPr lang="en-US" sz="1600" dirty="0">
+                <a:latin typeface="Consolas" panose="020B0609020204030204" pitchFamily="49" charset="0"/>
+                <a:cs typeface="Consolas" panose="020B0609020204030204" pitchFamily="49" charset="0"/>
+              </a:rPr>
+              <a:t>0x258     CMP R0, R1           ; NZCV = 1000</a:t>
+            </a:r>
+          </a:p>
+          <a:p>
+            <a:r>
+              <a:rPr lang="en-US" sz="1600" dirty="0">
+                <a:latin typeface="Consolas" panose="020B0609020204030204" pitchFamily="49" charset="0"/>
+                <a:cs typeface="Consolas" panose="020B0609020204030204" pitchFamily="49" charset="0"/>
+              </a:rPr>
+              <a:t>0x25A     BGE loop             ; PC = 0x25C (after this instruction)</a:t>
+            </a:r>
+          </a:p>
+          <a:p>
+            <a:r>
+              <a:rPr lang="en-US" sz="1600" dirty="0">
+                <a:latin typeface="Consolas" panose="020B0609020204030204" pitchFamily="49" charset="0"/>
+                <a:cs typeface="Consolas" panose="020B0609020204030204" pitchFamily="49" charset="0"/>
+              </a:rPr>
+              <a:t>0x25C     BL foo               ; LR = 0x260, PC = 0x262 (after this inst.)</a:t>
+            </a:r>
+          </a:p>
+          <a:p>
+            <a:r>
+              <a:rPr lang="en-US" sz="1600" dirty="0">
+                <a:latin typeface="Consolas" panose="020B0609020204030204" pitchFamily="49" charset="0"/>
+                <a:cs typeface="Consolas" panose="020B0609020204030204" pitchFamily="49" charset="0"/>
+              </a:rPr>
+              <a:t>0x260 loop B loop</a:t>
+            </a:r>
+          </a:p>
+          <a:p>
+            <a:r>
+              <a:rPr lang="en-US" sz="1600" dirty="0">
+                <a:latin typeface="Consolas" panose="020B0609020204030204" pitchFamily="49" charset="0"/>
+                <a:cs typeface="Consolas" panose="020B0609020204030204" pitchFamily="49" charset="0"/>
+              </a:rPr>
+              <a:t>          ENDP</a:t>
+            </a:r>
+          </a:p>
+          <a:p>
+            <a:endParaRPr lang="en-US" sz="1600" dirty="0">
+              <a:latin typeface="Consolas" panose="020B0609020204030204" pitchFamily="49" charset="0"/>
+              <a:cs typeface="Consolas" panose="020B0609020204030204" pitchFamily="49" charset="0"/>
+            </a:endParaRPr>
+          </a:p>
+          <a:p>
+            <a:r>
+              <a:rPr lang="en-US" sz="1600" dirty="0">
+                <a:latin typeface="Consolas" panose="020B0609020204030204" pitchFamily="49" charset="0"/>
+                <a:cs typeface="Consolas" panose="020B0609020204030204" pitchFamily="49" charset="0"/>
+              </a:rPr>
+              <a:t>foo       PROC</a:t>
+            </a:r>
+          </a:p>
+          <a:p>
+            <a:r>
+              <a:rPr lang="en-US" sz="1600" dirty="0">
+                <a:latin typeface="Consolas" panose="020B0609020204030204" pitchFamily="49" charset="0"/>
+                <a:cs typeface="Consolas" panose="020B0609020204030204" pitchFamily="49" charset="0"/>
+              </a:rPr>
+              <a:t>0x262     PUSH{R0, R1}         ; SP = </a:t>
+            </a:r>
+            <a:r>
+              <a:rPr lang="en-US" sz="1600" dirty="0"/>
+              <a:t>0x100001F8</a:t>
+            </a:r>
+            <a:endParaRPr lang="en-US" sz="1600" dirty="0">
+              <a:latin typeface="Consolas" panose="020B0609020204030204" pitchFamily="49" charset="0"/>
+              <a:cs typeface="Consolas" panose="020B0609020204030204" pitchFamily="49" charset="0"/>
+            </a:endParaRPr>
+          </a:p>
+          <a:p>
+            <a:r>
+              <a:rPr lang="en-US" sz="1600" dirty="0">
+                <a:latin typeface="Consolas" panose="020B0609020204030204" pitchFamily="49" charset="0"/>
+                <a:cs typeface="Consolas" panose="020B0609020204030204" pitchFamily="49" charset="0"/>
+              </a:rPr>
+              <a:t>0x264     POP{R1}              ; R1 = 5</a:t>
+            </a:r>
+          </a:p>
+          <a:p>
+            <a:r>
+              <a:rPr lang="en-US" sz="1600" dirty="0">
+                <a:latin typeface="Consolas" panose="020B0609020204030204" pitchFamily="49" charset="0"/>
+                <a:cs typeface="Consolas" panose="020B0609020204030204" pitchFamily="49" charset="0"/>
+              </a:rPr>
+              <a:t>0x266     POP{R0}              ; R0 = 10, SP = </a:t>
+            </a:r>
+            <a:r>
+              <a:rPr lang="en-US" sz="1600" dirty="0"/>
+              <a:t>0x10000200</a:t>
+            </a:r>
+            <a:endParaRPr lang="en-US" sz="1600" dirty="0">
+              <a:latin typeface="Consolas" panose="020B0609020204030204" pitchFamily="49" charset="0"/>
+              <a:cs typeface="Consolas" panose="020B0609020204030204" pitchFamily="49" charset="0"/>
+            </a:endParaRPr>
+          </a:p>
+          <a:p>
+            <a:r>
+              <a:rPr lang="en-US" sz="1600" dirty="0">
+                <a:latin typeface="Consolas" panose="020B0609020204030204" pitchFamily="49" charset="0"/>
+                <a:cs typeface="Consolas" panose="020B0609020204030204" pitchFamily="49" charset="0"/>
+              </a:rPr>
+              <a:t>0x268     BX LR                ; LR = 0x260, PC = 0x260 (after this inst.)</a:t>
+            </a:r>
+          </a:p>
+          <a:p>
+            <a:r>
+              <a:rPr lang="en-US" sz="1600" dirty="0">
+                <a:latin typeface="Consolas" panose="020B0609020204030204" pitchFamily="49" charset="0"/>
+                <a:cs typeface="Consolas" panose="020B0609020204030204" pitchFamily="49" charset="0"/>
+              </a:rPr>
+              <a:t>          ENDP</a:t>
+            </a:r>
+          </a:p>
+        </p:txBody>
+      </p:sp>
+    </p:spTree>
+    <p:extLst>
+      <p:ext uri="{BB962C8B-B14F-4D97-AF65-F5344CB8AC3E}">
+        <p14:creationId xmlns:p14="http://schemas.microsoft.com/office/powerpoint/2010/main" val="1011627645"/>
+      </p:ext>
+    </p:extLst>
+  </p:cSld>
+  <p:clrMapOvr>
+    <a:masterClrMapping/>
+  </p:clrMapOvr>
+</p:sld>
+</file>
+
+<file path=ppt/slides/slide27.xml><?xml version="1.0" encoding="utf-8"?>
 <p:sld xmlns:a="http://schemas.openxmlformats.org/drawingml/2006/main" xmlns:r="http://schemas.openxmlformats.org/officeDocument/2006/relationships" xmlns:p="http://schemas.openxmlformats.org/presentationml/2006/main">
   <p:cSld>
     <p:spTree>
@@ -26724,6 +26955,409 @@
           <p:cNvPr id="2" name="Title 1">
             <a:extLst>
               <a:ext uri="{FF2B5EF4-FFF2-40B4-BE49-F238E27FC236}">
+                <a16:creationId xmlns:a16="http://schemas.microsoft.com/office/drawing/2014/main" id="{66BC4FE6-4AA6-4480-9C1A-B149B1641A6D}"/>
+              </a:ext>
+            </a:extLst>
+          </p:cNvPr>
+          <p:cNvSpPr>
+            <a:spLocks noGrp="1"/>
+          </p:cNvSpPr>
+          <p:nvPr>
+            <p:ph type="title"/>
+          </p:nvPr>
+        </p:nvSpPr>
+        <p:spPr/>
+        <p:txBody>
+          <a:bodyPr/>
+          <a:lstStyle/>
+          <a:p>
+            <a:r>
+              <a:rPr lang="en-US" dirty="0"/>
+              <a:t>Detailed Explanations</a:t>
+            </a:r>
+          </a:p>
+        </p:txBody>
+      </p:sp>
+      <p:sp>
+        <p:nvSpPr>
+          <p:cNvPr id="3" name="Slide Number Placeholder 2">
+            <a:extLst>
+              <a:ext uri="{FF2B5EF4-FFF2-40B4-BE49-F238E27FC236}">
+                <a16:creationId xmlns:a16="http://schemas.microsoft.com/office/drawing/2014/main" id="{BD64E820-1675-B2B0-054F-FAA01CAC05B1}"/>
+              </a:ext>
+            </a:extLst>
+          </p:cNvPr>
+          <p:cNvSpPr>
+            <a:spLocks noGrp="1"/>
+          </p:cNvSpPr>
+          <p:nvPr>
+            <p:ph type="sldNum" sz="quarter" idx="12"/>
+          </p:nvPr>
+        </p:nvSpPr>
+        <p:spPr/>
+        <p:txBody>
+          <a:bodyPr/>
+          <a:lstStyle/>
+          <a:p>
+            <a:fld id="{EA7C8D44-3667-46F6-9772-CC52308E2A7F}" type="slidenum">
+              <a:rPr kumimoji="0" lang="en-US" smtClean="0"/>
+              <a:pPr/>
+              <a:t>27</a:t>
+            </a:fld>
+            <a:endParaRPr kumimoji="0" lang="en-US" dirty="0"/>
+          </a:p>
+        </p:txBody>
+      </p:sp>
+      <p:sp>
+        <p:nvSpPr>
+          <p:cNvPr id="4" name="Content Placeholder 3">
+            <a:extLst>
+              <a:ext uri="{FF2B5EF4-FFF2-40B4-BE49-F238E27FC236}">
+                <a16:creationId xmlns:a16="http://schemas.microsoft.com/office/drawing/2014/main" id="{0D3349F2-AD23-9931-E5C9-567BF200C2ED}"/>
+              </a:ext>
+            </a:extLst>
+          </p:cNvPr>
+          <p:cNvSpPr>
+            <a:spLocks noGrp="1"/>
+          </p:cNvSpPr>
+          <p:nvPr>
+            <p:ph sz="quarter" idx="1"/>
+          </p:nvPr>
+        </p:nvSpPr>
+        <p:spPr>
+          <a:xfrm>
+            <a:off x="457200" y="1143000"/>
+            <a:ext cx="8229600" cy="5334000"/>
+          </a:xfrm>
+        </p:spPr>
+        <p:txBody>
+          <a:bodyPr>
+            <a:normAutofit fontScale="55000" lnSpcReduction="20000"/>
+          </a:bodyPr>
+          <a:lstStyle/>
+          <a:p>
+            <a:r>
+              <a:rPr lang="en-US" dirty="0"/>
+              <a:t>1. CMP R0, R1 (0x858/0x258)</a:t>
+            </a:r>
+          </a:p>
+          <a:p>
+            <a:pPr lvl="1"/>
+            <a:r>
+              <a:rPr lang="en-US" dirty="0"/>
+              <a:t>Performs: 8 - 10</a:t>
+            </a:r>
+          </a:p>
+          <a:p>
+            <a:pPr lvl="1"/>
+            <a:r>
+              <a:rPr lang="en-US" dirty="0"/>
+              <a:t>NZCV = 1000 (Negative=1, Zero=0, Carry=0, Overflow=0)</a:t>
+            </a:r>
+          </a:p>
+          <a:p>
+            <a:r>
+              <a:rPr lang="en-US" dirty="0"/>
+              <a:t>2. BGE loop (0x25A)</a:t>
+            </a:r>
+          </a:p>
+          <a:p>
+            <a:pPr lvl="1"/>
+            <a:r>
+              <a:rPr lang="en-US" dirty="0"/>
+              <a:t>BGE checks if N == V (Greater or Equal in signed comparison)</a:t>
+            </a:r>
+          </a:p>
+          <a:p>
+            <a:pPr lvl="1"/>
+            <a:r>
+              <a:rPr lang="en-US" dirty="0"/>
+              <a:t>Since N=1 and V=0, condition is FALSE</a:t>
+            </a:r>
+          </a:p>
+          <a:p>
+            <a:r>
+              <a:rPr lang="en-US" dirty="0"/>
+              <a:t>Branch NOT taken, continues to next instruction</a:t>
+            </a:r>
+          </a:p>
+          <a:p>
+            <a:pPr lvl="1"/>
+            <a:r>
+              <a:rPr lang="en-US" dirty="0"/>
+              <a:t>PC = 0x25C</a:t>
+            </a:r>
+          </a:p>
+          <a:p>
+            <a:r>
+              <a:rPr lang="en-US" dirty="0"/>
+              <a:t>3. BL foo (0x25C)</a:t>
+            </a:r>
+          </a:p>
+          <a:p>
+            <a:pPr lvl="1"/>
+            <a:r>
+              <a:rPr lang="en-US" dirty="0"/>
+              <a:t>Saves return address in LR and branches to foo</a:t>
+            </a:r>
+          </a:p>
+          <a:p>
+            <a:pPr lvl="1"/>
+            <a:r>
+              <a:rPr lang="en-US" dirty="0"/>
+              <a:t>LR = 0x260 (next instruction after BL)</a:t>
+            </a:r>
+          </a:p>
+          <a:p>
+            <a:pPr lvl="1"/>
+            <a:r>
+              <a:rPr lang="en-US" dirty="0"/>
+              <a:t>PC = 0x262 (address of foo)</a:t>
+            </a:r>
+          </a:p>
+          <a:p>
+            <a:r>
+              <a:rPr lang="en-US" dirty="0"/>
+              <a:t>4. PUSH {R0, R1} (0x262)</a:t>
+            </a:r>
+          </a:p>
+          <a:p>
+            <a:pPr lvl="1"/>
+            <a:r>
+              <a:rPr lang="en-US" dirty="0"/>
+              <a:t>Stack is descending and full, so SP decrements by 8 bytes (2 registers × 4 bytes)</a:t>
+            </a:r>
+          </a:p>
+          <a:p>
+            <a:pPr lvl="1"/>
+            <a:r>
+              <a:rPr lang="en-US" dirty="0"/>
+              <a:t>SP = 0x10000200 - 8 = 0x100001F8</a:t>
+            </a:r>
+          </a:p>
+          <a:p>
+            <a:r>
+              <a:rPr lang="en-US" dirty="0"/>
+              <a:t>5. POP {R0} (0x266)</a:t>
+            </a:r>
+          </a:p>
+          <a:p>
+            <a:pPr lvl="1"/>
+            <a:r>
+              <a:rPr lang="en-US" dirty="0"/>
+              <a:t>After popping both registers, R0 and R1 are swapped</a:t>
+            </a:r>
+          </a:p>
+          <a:p>
+            <a:pPr lvl="1"/>
+            <a:r>
+              <a:rPr lang="en-US" dirty="0"/>
+              <a:t>R0 = 10 (original R1 value)</a:t>
+            </a:r>
+          </a:p>
+          <a:p>
+            <a:pPr lvl="1"/>
+            <a:r>
+              <a:rPr lang="en-US" dirty="0"/>
+              <a:t>SP = 0x10000200 (back to original)</a:t>
+            </a:r>
+          </a:p>
+          <a:p>
+            <a:r>
+              <a:rPr lang="en-US" dirty="0"/>
+              <a:t>6. BX LR (0x268)</a:t>
+            </a:r>
+          </a:p>
+          <a:p>
+            <a:pPr lvl="1"/>
+            <a:r>
+              <a:rPr lang="en-US" dirty="0"/>
+              <a:t>Returns to address stored in LR</a:t>
+            </a:r>
+          </a:p>
+          <a:p>
+            <a:pPr lvl="1"/>
+            <a:r>
+              <a:rPr lang="en-US" dirty="0"/>
+              <a:t>LR = 0x260 (unchanged)</a:t>
+            </a:r>
+          </a:p>
+          <a:p>
+            <a:pPr lvl="1"/>
+            <a:r>
+              <a:rPr lang="en-US" dirty="0"/>
+              <a:t>PC = 0x260 (returns to caller)</a:t>
+            </a:r>
+          </a:p>
+        </p:txBody>
+      </p:sp>
+    </p:spTree>
+    <p:extLst>
+      <p:ext uri="{BB962C8B-B14F-4D97-AF65-F5344CB8AC3E}">
+        <p14:creationId xmlns:p14="http://schemas.microsoft.com/office/powerpoint/2010/main" val="150664292"/>
+      </p:ext>
+    </p:extLst>
+  </p:cSld>
+  <p:clrMapOvr>
+    <a:masterClrMapping/>
+  </p:clrMapOvr>
+</p:sld>
+</file>
+
+<file path=ppt/slides/slide28.xml><?xml version="1.0" encoding="utf-8"?>
+<p:sld xmlns:a="http://schemas.openxmlformats.org/drawingml/2006/main" xmlns:r="http://schemas.openxmlformats.org/officeDocument/2006/relationships" xmlns:p="http://schemas.openxmlformats.org/presentationml/2006/main">
+  <p:cSld>
+    <p:spTree>
+      <p:nvGrpSpPr>
+        <p:cNvPr id="1" name=""/>
+        <p:cNvGrpSpPr/>
+        <p:nvPr/>
+      </p:nvGrpSpPr>
+      <p:grpSpPr>
+        <a:xfrm>
+          <a:off x="0" y="0"/>
+          <a:ext cx="0" cy="0"/>
+          <a:chOff x="0" y="0"/>
+          <a:chExt cx="0" cy="0"/>
+        </a:xfrm>
+      </p:grpSpPr>
+      <p:sp>
+        <p:nvSpPr>
+          <p:cNvPr id="2" name="Title 1">
+            <a:extLst>
+              <a:ext uri="{FF2B5EF4-FFF2-40B4-BE49-F238E27FC236}">
+                <a16:creationId xmlns:a16="http://schemas.microsoft.com/office/drawing/2014/main" id="{2D6E065B-6E1F-B821-412C-FD0AA6D6FFAC}"/>
+              </a:ext>
+            </a:extLst>
+          </p:cNvPr>
+          <p:cNvSpPr>
+            <a:spLocks noGrp="1"/>
+          </p:cNvSpPr>
+          <p:nvPr>
+            <p:ph type="title"/>
+          </p:nvPr>
+        </p:nvSpPr>
+        <p:spPr/>
+        <p:txBody>
+          <a:bodyPr/>
+          <a:lstStyle/>
+          <a:p>
+            <a:pPr algn="ctr"/>
+            <a:r>
+              <a:rPr lang="en-US" dirty="0">
+                <a:solidFill>
+                  <a:srgbClr val="C00000"/>
+                </a:solidFill>
+              </a:rPr>
+              <a:t>Separator Page</a:t>
+            </a:r>
+          </a:p>
+        </p:txBody>
+      </p:sp>
+      <p:sp>
+        <p:nvSpPr>
+          <p:cNvPr id="3" name="Slide Number Placeholder 2">
+            <a:extLst>
+              <a:ext uri="{FF2B5EF4-FFF2-40B4-BE49-F238E27FC236}">
+                <a16:creationId xmlns:a16="http://schemas.microsoft.com/office/drawing/2014/main" id="{AD736B6C-17FB-16E1-408B-AB3C19FF2650}"/>
+              </a:ext>
+            </a:extLst>
+          </p:cNvPr>
+          <p:cNvSpPr>
+            <a:spLocks noGrp="1"/>
+          </p:cNvSpPr>
+          <p:nvPr>
+            <p:ph type="sldNum" sz="quarter" idx="12"/>
+          </p:nvPr>
+        </p:nvSpPr>
+        <p:spPr/>
+        <p:txBody>
+          <a:bodyPr/>
+          <a:lstStyle/>
+          <a:p>
+            <a:fld id="{EA7C8D44-3667-46F6-9772-CC52308E2A7F}" type="slidenum">
+              <a:rPr kumimoji="0" lang="en-US" smtClean="0"/>
+              <a:pPr/>
+              <a:t>28</a:t>
+            </a:fld>
+            <a:endParaRPr kumimoji="0" lang="en-US" dirty="0"/>
+          </a:p>
+        </p:txBody>
+      </p:sp>
+      <p:sp>
+        <p:nvSpPr>
+          <p:cNvPr id="4" name="Content Placeholder 3">
+            <a:extLst>
+              <a:ext uri="{FF2B5EF4-FFF2-40B4-BE49-F238E27FC236}">
+                <a16:creationId xmlns:a16="http://schemas.microsoft.com/office/drawing/2014/main" id="{0C9C6FA3-D066-E5DA-E405-23B7F5B00998}"/>
+              </a:ext>
+            </a:extLst>
+          </p:cNvPr>
+          <p:cNvSpPr>
+            <a:spLocks noGrp="1"/>
+          </p:cNvSpPr>
+          <p:nvPr>
+            <p:ph sz="quarter" idx="1"/>
+          </p:nvPr>
+        </p:nvSpPr>
+        <p:spPr/>
+        <p:txBody>
+          <a:bodyPr>
+            <a:normAutofit/>
+          </a:bodyPr>
+          <a:lstStyle/>
+          <a:p>
+            <a:r>
+              <a:rPr lang="en-US" altLang="zh-CN" sz="4000" dirty="0">
+                <a:solidFill>
+                  <a:srgbClr val="C00000"/>
+                </a:solidFill>
+              </a:rPr>
+              <a:t>The following slides will not be covered in the exam</a:t>
+            </a:r>
+            <a:endParaRPr lang="en-US" sz="4000" dirty="0">
+              <a:solidFill>
+                <a:srgbClr val="C00000"/>
+              </a:solidFill>
+            </a:endParaRPr>
+          </a:p>
+        </p:txBody>
+      </p:sp>
+    </p:spTree>
+    <p:extLst>
+      <p:ext uri="{BB962C8B-B14F-4D97-AF65-F5344CB8AC3E}">
+        <p14:creationId xmlns:p14="http://schemas.microsoft.com/office/powerpoint/2010/main" val="780454370"/>
+      </p:ext>
+    </p:extLst>
+  </p:cSld>
+  <p:clrMapOvr>
+    <a:masterClrMapping/>
+  </p:clrMapOvr>
+</p:sld>
+</file>
+
+<file path=ppt/slides/slide29.xml><?xml version="1.0" encoding="utf-8"?>
+<p:sld xmlns:a="http://schemas.openxmlformats.org/drawingml/2006/main" xmlns:r="http://schemas.openxmlformats.org/officeDocument/2006/relationships" xmlns:p="http://schemas.openxmlformats.org/presentationml/2006/main">
+  <p:cSld>
+    <p:spTree>
+      <p:nvGrpSpPr>
+        <p:cNvPr id="1" name=""/>
+        <p:cNvGrpSpPr/>
+        <p:nvPr/>
+      </p:nvGrpSpPr>
+      <p:grpSpPr>
+        <a:xfrm>
+          <a:off x="0" y="0"/>
+          <a:ext cx="0" cy="0"/>
+          <a:chOff x="0" y="0"/>
+          <a:chExt cx="0" cy="0"/>
+        </a:xfrm>
+      </p:grpSpPr>
+      <p:sp>
+        <p:nvSpPr>
+          <p:cNvPr id="2" name="Title 1">
+            <a:extLst>
+              <a:ext uri="{FF2B5EF4-FFF2-40B4-BE49-F238E27FC236}">
                 <a16:creationId xmlns:a16="http://schemas.microsoft.com/office/drawing/2014/main" id="{440EADDE-B5E4-F571-7D39-10F7E6EFD50E}"/>
               </a:ext>
             </a:extLst>
@@ -26771,7 +27405,7 @@
             <a:fld id="{EA7C8D44-3667-46F6-9772-CC52308E2A7F}" type="slidenum">
               <a:rPr kumimoji="0" lang="en-US" smtClean="0"/>
               <a:pPr/>
-              <a:t>26</a:t>
+              <a:t>29</a:t>
             </a:fld>
             <a:endParaRPr kumimoji="0" lang="en-US" dirty="0"/>
           </a:p>
@@ -27065,7 +27699,7 @@
 </p:sld>
 </file>
 
-<file path=ppt/slides/slide27.xml><?xml version="1.0" encoding="utf-8"?>
+<file path=ppt/slides/slide3.xml><?xml version="1.0" encoding="utf-8"?>
 <p:sld xmlns:a="http://schemas.openxmlformats.org/drawingml/2006/main" xmlns:r="http://schemas.openxmlformats.org/officeDocument/2006/relationships" xmlns:p="http://schemas.openxmlformats.org/presentationml/2006/main">
   <p:cSld>
     <p:spTree>
@@ -27084,6 +27718,764 @@
       </p:grpSpPr>
       <p:sp>
         <p:nvSpPr>
+          <p:cNvPr id="2" name="Title 1"/>
+          <p:cNvSpPr>
+            <a:spLocks noGrp="1"/>
+          </p:cNvSpPr>
+          <p:nvPr>
+            <p:ph type="title"/>
+          </p:nvPr>
+        </p:nvSpPr>
+        <p:spPr/>
+        <p:txBody>
+          <a:bodyPr/>
+          <a:lstStyle/>
+          <a:p>
+            <a:r>
+              <a:rPr lang="en-GB" dirty="0"/>
+              <a:t>Stack</a:t>
+            </a:r>
+          </a:p>
+        </p:txBody>
+      </p:sp>
+      <p:sp>
+        <p:nvSpPr>
+          <p:cNvPr id="3" name="Content Placeholder 2"/>
+          <p:cNvSpPr>
+            <a:spLocks noGrp="1"/>
+          </p:cNvSpPr>
+          <p:nvPr>
+            <p:ph idx="1"/>
+          </p:nvPr>
+        </p:nvSpPr>
+        <p:spPr/>
+        <p:txBody>
+          <a:bodyPr/>
+          <a:lstStyle/>
+          <a:p>
+            <a:pPr>
+              <a:buNone/>
+            </a:pPr>
+            <a:r>
+              <a:rPr lang="en-GB" sz="2100" b="1" dirty="0">
+                <a:solidFill>
+                  <a:srgbClr val="FF0000"/>
+                </a:solidFill>
+                <a:latin typeface="Consolas" panose="020B0609020204030204" pitchFamily="49" charset="0"/>
+                <a:cs typeface="Consolas" panose="020B0609020204030204" pitchFamily="49" charset="0"/>
+              </a:rPr>
+              <a:t>POP</a:t>
+            </a:r>
+            <a:r>
+              <a:rPr lang="en-GB" sz="2100" dirty="0">
+                <a:solidFill>
+                  <a:srgbClr val="FF0000"/>
+                </a:solidFill>
+                <a:latin typeface="Consolas" panose="020B0609020204030204" pitchFamily="49" charset="0"/>
+                <a:cs typeface="Consolas" panose="020B0609020204030204" pitchFamily="49" charset="0"/>
+              </a:rPr>
+              <a:t> </a:t>
+            </a:r>
+            <a:r>
+              <a:rPr lang="en-GB" sz="2100" dirty="0">
+                <a:latin typeface="Consolas" panose="020B0609020204030204" pitchFamily="49" charset="0"/>
+                <a:cs typeface="Consolas" panose="020B0609020204030204" pitchFamily="49" charset="0"/>
+              </a:rPr>
+              <a:t>{</a:t>
+            </a:r>
+            <a:r>
+              <a:rPr lang="en-GB" sz="2100" i="1" dirty="0">
+                <a:latin typeface="Consolas" panose="020B0609020204030204" pitchFamily="49" charset="0"/>
+                <a:cs typeface="Consolas" panose="020B0609020204030204" pitchFamily="49" charset="0"/>
+              </a:rPr>
+              <a:t>Rd</a:t>
+            </a:r>
+            <a:r>
+              <a:rPr lang="en-GB" sz="2100" dirty="0">
+                <a:latin typeface="Consolas" panose="020B0609020204030204" pitchFamily="49" charset="0"/>
+                <a:cs typeface="Consolas" panose="020B0609020204030204" pitchFamily="49" charset="0"/>
+              </a:rPr>
+              <a:t>} == LDMIA SP!, {Rd} == LDMFD SP!, {Rd}</a:t>
+            </a:r>
+          </a:p>
+          <a:p>
+            <a:pPr lvl="1"/>
+            <a:r>
+              <a:rPr lang="sv-SE" sz="1800" dirty="0">
+                <a:latin typeface="Consolas" panose="020B0609020204030204" pitchFamily="49" charset="0"/>
+                <a:cs typeface="Consolas" panose="020B0609020204030204" pitchFamily="49" charset="0"/>
+              </a:rPr>
+              <a:t>LDR Rd, [SP] @ </a:t>
+            </a:r>
+            <a:r>
+              <a:rPr lang="en-GB" sz="1800" dirty="0">
+                <a:latin typeface="Consolas" panose="020B0609020204030204" pitchFamily="49" charset="0"/>
+                <a:cs typeface="Consolas" panose="020B0609020204030204" pitchFamily="49" charset="0"/>
+              </a:rPr>
+              <a:t>Rd = (*SP)    </a:t>
+            </a:r>
+            <a:r>
+              <a:rPr lang="en-GB" sz="1800" dirty="0">
+                <a:latin typeface="Cambria Math"/>
+                <a:ea typeface="Cambria Math"/>
+                <a:cs typeface="Consolas" panose="020B0609020204030204" pitchFamily="49" charset="0"/>
+              </a:rPr>
+              <a:t>(full stack)</a:t>
+            </a:r>
+            <a:endParaRPr lang="en-GB" sz="1800" dirty="0">
+              <a:latin typeface="Consolas" panose="020B0609020204030204" pitchFamily="49" charset="0"/>
+              <a:cs typeface="Consolas" panose="020B0609020204030204" pitchFamily="49" charset="0"/>
+            </a:endParaRPr>
+          </a:p>
+          <a:p>
+            <a:pPr lvl="1"/>
+            <a:r>
+              <a:rPr lang="en-GB" sz="1800" dirty="0">
+                <a:latin typeface="Consolas" panose="020B0609020204030204" pitchFamily="49" charset="0"/>
+                <a:cs typeface="Consolas" panose="020B0609020204030204" pitchFamily="49" charset="0"/>
+              </a:rPr>
+              <a:t>ADD SP, #4   </a:t>
+            </a:r>
+            <a:r>
+              <a:rPr lang="sv-SE" sz="1800" dirty="0">
+                <a:latin typeface="Consolas" panose="020B0609020204030204" pitchFamily="49" charset="0"/>
+                <a:cs typeface="Consolas" panose="020B0609020204030204" pitchFamily="49" charset="0"/>
+              </a:rPr>
+              <a:t>@ </a:t>
+            </a:r>
+            <a:r>
+              <a:rPr lang="en-GB" sz="1800" dirty="0">
+                <a:latin typeface="Consolas" panose="020B0609020204030204" pitchFamily="49" charset="0"/>
+                <a:cs typeface="Consolas" panose="020B0609020204030204" pitchFamily="49" charset="0"/>
+              </a:rPr>
+              <a:t>SP = SP + 4   </a:t>
+            </a:r>
+            <a:r>
+              <a:rPr lang="en-GB" sz="1800" dirty="0">
+                <a:latin typeface="Cambria Math"/>
+                <a:ea typeface="Cambria Math"/>
+                <a:cs typeface="Consolas" panose="020B0609020204030204" pitchFamily="49" charset="0"/>
+              </a:rPr>
+              <a:t>(Stack shrinks)</a:t>
+            </a:r>
+          </a:p>
+          <a:p>
+            <a:pPr lvl="1"/>
+            <a:endParaRPr lang="en-GB" sz="2025" dirty="0">
+              <a:latin typeface="Consolas" panose="020B0609020204030204" pitchFamily="49" charset="0"/>
+              <a:cs typeface="Consolas" panose="020B0609020204030204" pitchFamily="49" charset="0"/>
+            </a:endParaRPr>
+          </a:p>
+          <a:p>
+            <a:pPr marL="0" indent="0">
+              <a:buNone/>
+            </a:pPr>
+            <a:r>
+              <a:rPr lang="en-GB" sz="2025" dirty="0">
+                <a:cs typeface="Consolas" panose="020B0609020204030204" pitchFamily="49" charset="0"/>
+              </a:rPr>
+              <a:t>Pop multiple registers</a:t>
+            </a:r>
+          </a:p>
+        </p:txBody>
+      </p:sp>
+      <p:sp>
+        <p:nvSpPr>
+          <p:cNvPr id="4" name="Slide Number Placeholder 3"/>
+          <p:cNvSpPr>
+            <a:spLocks noGrp="1"/>
+          </p:cNvSpPr>
+          <p:nvPr>
+            <p:ph type="sldNum" sz="quarter" idx="12"/>
+          </p:nvPr>
+        </p:nvSpPr>
+        <p:spPr/>
+        <p:txBody>
+          <a:bodyPr/>
+          <a:lstStyle/>
+          <a:p>
+            <a:pPr defTabSz="685800"/>
+            <a:fld id="{EA7C8D44-3667-46F6-9772-CC52308E2A7F}" type="slidenum">
+              <a:rPr lang="en-US">
+                <a:solidFill>
+                  <a:srgbClr val="1F497D"/>
+                </a:solidFill>
+                <a:latin typeface="Gill Sans MT"/>
+              </a:rPr>
+              <a:pPr defTabSz="685800"/>
+              <a:t>3</a:t>
+            </a:fld>
+            <a:endParaRPr lang="en-US" dirty="0">
+              <a:solidFill>
+                <a:srgbClr val="1F497D"/>
+              </a:solidFill>
+              <a:latin typeface="Gill Sans MT"/>
+            </a:endParaRPr>
+          </a:p>
+        </p:txBody>
+      </p:sp>
+      <p:sp>
+        <p:nvSpPr>
+          <p:cNvPr id="5" name="Rectangle 4"/>
+          <p:cNvSpPr/>
+          <p:nvPr/>
+        </p:nvSpPr>
+        <p:spPr>
+          <a:xfrm>
+            <a:off x="3629026" y="4075262"/>
+            <a:ext cx="2025632" cy="507831"/>
+          </a:xfrm>
+          <a:prstGeom prst="rect">
+            <a:avLst/>
+          </a:prstGeom>
+        </p:spPr>
+        <p:txBody>
+          <a:bodyPr wrap="square">
+            <a:spAutoFit/>
+          </a:bodyPr>
+          <a:lstStyle/>
+          <a:p>
+            <a:pPr defTabSz="685800"/>
+            <a:r>
+              <a:rPr lang="en-GB" sz="1350" b="1" dirty="0">
+                <a:solidFill>
+                  <a:srgbClr val="FF0000"/>
+                </a:solidFill>
+                <a:latin typeface="Consolas" panose="020B0609020204030204" pitchFamily="49" charset="0"/>
+                <a:cs typeface="Consolas" panose="020B0609020204030204" pitchFamily="49" charset="0"/>
+              </a:rPr>
+              <a:t>POP {r7, r3, r2, r1}</a:t>
+            </a:r>
+          </a:p>
+        </p:txBody>
+      </p:sp>
+      <p:sp>
+        <p:nvSpPr>
+          <p:cNvPr id="7" name="TextBox 6"/>
+          <p:cNvSpPr txBox="1"/>
+          <p:nvPr/>
+        </p:nvSpPr>
+        <p:spPr>
+          <a:xfrm>
+            <a:off x="3744661" y="3763639"/>
+            <a:ext cx="1521827" cy="300082"/>
+          </a:xfrm>
+          <a:prstGeom prst="rect">
+            <a:avLst/>
+          </a:prstGeom>
+          <a:noFill/>
+        </p:spPr>
+        <p:txBody>
+          <a:bodyPr wrap="none" rtlCol="0">
+            <a:spAutoFit/>
+          </a:bodyPr>
+          <a:lstStyle/>
+          <a:p>
+            <a:pPr defTabSz="685800"/>
+            <a:r>
+              <a:rPr lang="en-US" sz="1350" i="1" dirty="0">
+                <a:solidFill>
+                  <a:prstClr val="black"/>
+                </a:solidFill>
+                <a:latin typeface="Gill Sans MT"/>
+              </a:rPr>
+              <a:t>They are equivalent. </a:t>
+            </a:r>
+          </a:p>
+        </p:txBody>
+      </p:sp>
+      <p:sp>
+        <p:nvSpPr>
+          <p:cNvPr id="9" name="Rectangle 8"/>
+          <p:cNvSpPr/>
+          <p:nvPr/>
+        </p:nvSpPr>
+        <p:spPr>
+          <a:xfrm>
+            <a:off x="6224130" y="3763639"/>
+            <a:ext cx="941283" cy="923330"/>
+          </a:xfrm>
+          <a:prstGeom prst="rect">
+            <a:avLst/>
+          </a:prstGeom>
+        </p:spPr>
+        <p:txBody>
+          <a:bodyPr wrap="none">
+            <a:spAutoFit/>
+          </a:bodyPr>
+          <a:lstStyle/>
+          <a:p>
+            <a:pPr defTabSz="685800"/>
+            <a:r>
+              <a:rPr lang="en-GB" sz="1350" b="1" dirty="0">
+                <a:solidFill>
+                  <a:srgbClr val="FF0000"/>
+                </a:solidFill>
+                <a:latin typeface="Consolas" panose="020B0609020204030204" pitchFamily="49" charset="0"/>
+                <a:cs typeface="Consolas" panose="020B0609020204030204" pitchFamily="49" charset="0"/>
+              </a:rPr>
+              <a:t>POP {r1}</a:t>
+            </a:r>
+          </a:p>
+          <a:p>
+            <a:pPr defTabSz="685800"/>
+            <a:r>
+              <a:rPr lang="en-GB" sz="1350" b="1" dirty="0">
+                <a:solidFill>
+                  <a:srgbClr val="FF0000"/>
+                </a:solidFill>
+                <a:latin typeface="Consolas" panose="020B0609020204030204" pitchFamily="49" charset="0"/>
+                <a:cs typeface="Consolas" panose="020B0609020204030204" pitchFamily="49" charset="0"/>
+              </a:rPr>
+              <a:t>POP {r2}</a:t>
+            </a:r>
+          </a:p>
+          <a:p>
+            <a:pPr defTabSz="685800"/>
+            <a:r>
+              <a:rPr lang="en-GB" sz="1350" b="1" dirty="0">
+                <a:solidFill>
+                  <a:srgbClr val="FF0000"/>
+                </a:solidFill>
+                <a:latin typeface="Consolas" panose="020B0609020204030204" pitchFamily="49" charset="0"/>
+                <a:cs typeface="Consolas" panose="020B0609020204030204" pitchFamily="49" charset="0"/>
+              </a:rPr>
+              <a:t>POP {r3}</a:t>
+            </a:r>
+          </a:p>
+          <a:p>
+            <a:pPr defTabSz="685800"/>
+            <a:r>
+              <a:rPr lang="en-GB" sz="1350" b="1" dirty="0">
+                <a:solidFill>
+                  <a:srgbClr val="FF0000"/>
+                </a:solidFill>
+                <a:latin typeface="Consolas" panose="020B0609020204030204" pitchFamily="49" charset="0"/>
+                <a:cs typeface="Consolas" panose="020B0609020204030204" pitchFamily="49" charset="0"/>
+              </a:rPr>
+              <a:t>POP {r7}</a:t>
+            </a:r>
+          </a:p>
+        </p:txBody>
+      </p:sp>
+      <p:sp>
+        <p:nvSpPr>
+          <p:cNvPr id="10" name="Rectangle 9"/>
+          <p:cNvSpPr/>
+          <p:nvPr/>
+        </p:nvSpPr>
+        <p:spPr>
+          <a:xfrm>
+            <a:off x="1125325" y="4075262"/>
+            <a:ext cx="2076209" cy="300082"/>
+          </a:xfrm>
+          <a:prstGeom prst="rect">
+            <a:avLst/>
+          </a:prstGeom>
+        </p:spPr>
+        <p:txBody>
+          <a:bodyPr wrap="none">
+            <a:spAutoFit/>
+          </a:bodyPr>
+          <a:lstStyle/>
+          <a:p>
+            <a:pPr defTabSz="685800"/>
+            <a:r>
+              <a:rPr lang="en-GB" sz="1350" b="1" dirty="0">
+                <a:solidFill>
+                  <a:srgbClr val="FF0000"/>
+                </a:solidFill>
+                <a:latin typeface="Consolas" panose="020B0609020204030204" pitchFamily="49" charset="0"/>
+                <a:cs typeface="Consolas" panose="020B0609020204030204" pitchFamily="49" charset="0"/>
+              </a:rPr>
+              <a:t>POP {r1, r2, r3, r7}</a:t>
+            </a:r>
+          </a:p>
+        </p:txBody>
+      </p:sp>
+      <p:sp>
+        <p:nvSpPr>
+          <p:cNvPr id="11" name="Left-Right Arrow 10"/>
+          <p:cNvSpPr/>
+          <p:nvPr/>
+        </p:nvSpPr>
+        <p:spPr>
+          <a:xfrm>
+            <a:off x="3213091" y="4139556"/>
+            <a:ext cx="362213" cy="148412"/>
+          </a:xfrm>
+          <a:prstGeom prst="leftRightArrow">
+            <a:avLst/>
+          </a:prstGeom>
+        </p:spPr>
+        <p:style>
+          <a:lnRef idx="2">
+            <a:schemeClr val="accent1">
+              <a:shade val="50000"/>
+            </a:schemeClr>
+          </a:lnRef>
+          <a:fillRef idx="1">
+            <a:schemeClr val="accent1"/>
+          </a:fillRef>
+          <a:effectRef idx="0">
+            <a:schemeClr val="accent1"/>
+          </a:effectRef>
+          <a:fontRef idx="minor">
+            <a:schemeClr val="lt1"/>
+          </a:fontRef>
+        </p:style>
+        <p:txBody>
+          <a:bodyPr rtlCol="0" anchor="ctr"/>
+          <a:lstStyle/>
+          <a:p>
+            <a:pPr algn="ctr" defTabSz="685800"/>
+            <a:endParaRPr lang="en-US" sz="1350">
+              <a:solidFill>
+                <a:prstClr val="white"/>
+              </a:solidFill>
+              <a:latin typeface="Gill Sans MT"/>
+            </a:endParaRPr>
+          </a:p>
+        </p:txBody>
+      </p:sp>
+      <p:sp>
+        <p:nvSpPr>
+          <p:cNvPr id="12" name="Left-Right Arrow 11"/>
+          <p:cNvSpPr/>
+          <p:nvPr/>
+        </p:nvSpPr>
+        <p:spPr>
+          <a:xfrm>
+            <a:off x="5670541" y="4139556"/>
+            <a:ext cx="362213" cy="148412"/>
+          </a:xfrm>
+          <a:prstGeom prst="leftRightArrow">
+            <a:avLst/>
+          </a:prstGeom>
+        </p:spPr>
+        <p:style>
+          <a:lnRef idx="2">
+            <a:schemeClr val="accent1">
+              <a:shade val="50000"/>
+            </a:schemeClr>
+          </a:lnRef>
+          <a:fillRef idx="1">
+            <a:schemeClr val="accent1"/>
+          </a:fillRef>
+          <a:effectRef idx="0">
+            <a:schemeClr val="accent1"/>
+          </a:effectRef>
+          <a:fontRef idx="minor">
+            <a:schemeClr val="lt1"/>
+          </a:fontRef>
+        </p:style>
+        <p:txBody>
+          <a:bodyPr rtlCol="0" anchor="ctr"/>
+          <a:lstStyle/>
+          <a:p>
+            <a:pPr algn="ctr" defTabSz="685800"/>
+            <a:endParaRPr lang="en-US" sz="1350">
+              <a:solidFill>
+                <a:prstClr val="white"/>
+              </a:solidFill>
+              <a:latin typeface="Gill Sans MT"/>
+            </a:endParaRPr>
+          </a:p>
+        </p:txBody>
+      </p:sp>
+      <p:sp>
+        <p:nvSpPr>
+          <p:cNvPr id="6" name="Rectangle 5"/>
+          <p:cNvSpPr/>
+          <p:nvPr/>
+        </p:nvSpPr>
+        <p:spPr>
+          <a:xfrm>
+            <a:off x="441316" y="4663886"/>
+            <a:ext cx="8401050" cy="1015663"/>
+          </a:xfrm>
+          <a:prstGeom prst="rect">
+            <a:avLst/>
+          </a:prstGeom>
+        </p:spPr>
+        <p:txBody>
+          <a:bodyPr wrap="square">
+            <a:spAutoFit/>
+          </a:bodyPr>
+          <a:lstStyle/>
+          <a:p>
+            <a:pPr marL="214313" indent="-214313" defTabSz="685800">
+              <a:buFont typeface="Arial" panose="020B0604020202020204" pitchFamily="34" charset="0"/>
+              <a:buChar char="•"/>
+            </a:pPr>
+            <a:r>
+              <a:rPr lang="en-US" sz="1500" dirty="0">
+                <a:solidFill>
+                  <a:prstClr val="black"/>
+                </a:solidFill>
+                <a:latin typeface="Gill Sans MT"/>
+              </a:rPr>
+              <a:t>SP is incremented after POP (post-increment). </a:t>
+            </a:r>
+          </a:p>
+          <a:p>
+            <a:pPr marL="214313" indent="-214313" defTabSz="685800">
+              <a:buFont typeface="Arial" panose="020B0604020202020204" pitchFamily="34" charset="0"/>
+              <a:buChar char="•"/>
+            </a:pPr>
+            <a:r>
+              <a:rPr lang="en-US" sz="1500" dirty="0">
+                <a:solidFill>
+                  <a:prstClr val="black"/>
+                </a:solidFill>
+                <a:latin typeface="Gill Sans MT"/>
+              </a:rPr>
+              <a:t>The order in which registers listed in the register list does not matter. </a:t>
+            </a:r>
+          </a:p>
+          <a:p>
+            <a:pPr marL="214313" indent="-214313" defTabSz="685800">
+              <a:buFont typeface="Arial" panose="020B0604020202020204" pitchFamily="34" charset="0"/>
+              <a:buChar char="•"/>
+            </a:pPr>
+            <a:r>
+              <a:rPr lang="en-US" sz="1500" dirty="0">
+                <a:solidFill>
+                  <a:prstClr val="black"/>
+                </a:solidFill>
+                <a:latin typeface="Gill Sans MT"/>
+              </a:rPr>
+              <a:t>When popping multiple registers, these registers are automatically </a:t>
+            </a:r>
+            <a:r>
+              <a:rPr lang="en-US" sz="1500" dirty="0">
+                <a:solidFill>
+                  <a:srgbClr val="3333FF"/>
+                </a:solidFill>
+                <a:latin typeface="Gill Sans MT"/>
+              </a:rPr>
+              <a:t>sorted by name </a:t>
+            </a:r>
+            <a:r>
+              <a:rPr lang="en-US" sz="1500" dirty="0">
+                <a:solidFill>
+                  <a:prstClr val="black"/>
+                </a:solidFill>
+                <a:latin typeface="Gill Sans MT"/>
+              </a:rPr>
+              <a:t>and </a:t>
+            </a:r>
+            <a:r>
+              <a:rPr lang="en-US" sz="1500" dirty="0">
+                <a:solidFill>
+                  <a:srgbClr val="3333FF"/>
+                </a:solidFill>
+                <a:latin typeface="Gill Sans MT"/>
+              </a:rPr>
+              <a:t>the lowest-numbered register</a:t>
+            </a:r>
+            <a:r>
+              <a:rPr lang="en-US" sz="1500" dirty="0">
+                <a:solidFill>
+                  <a:prstClr val="black"/>
+                </a:solidFill>
+                <a:latin typeface="Gill Sans MT"/>
+              </a:rPr>
+              <a:t> is loaded from the lowest memory address, </a:t>
+            </a:r>
+            <a:r>
+              <a:rPr lang="en-US" sz="1500" i="1" dirty="0">
+                <a:solidFill>
+                  <a:prstClr val="black"/>
+                </a:solidFill>
+                <a:latin typeface="Gill Sans MT"/>
+              </a:rPr>
+              <a:t>i.e. </a:t>
+            </a:r>
+            <a:r>
+              <a:rPr lang="en-US" sz="1500" dirty="0">
+                <a:solidFill>
+                  <a:srgbClr val="3333FF"/>
+                </a:solidFill>
+                <a:latin typeface="Gill Sans MT"/>
+              </a:rPr>
+              <a:t>is loaded first</a:t>
+            </a:r>
+            <a:r>
+              <a:rPr lang="en-US" sz="1500" dirty="0">
+                <a:solidFill>
+                  <a:prstClr val="black"/>
+                </a:solidFill>
+                <a:latin typeface="Gill Sans MT"/>
+              </a:rPr>
+              <a:t>. </a:t>
+            </a:r>
+          </a:p>
+        </p:txBody>
+      </p:sp>
+      <p:pic>
+        <p:nvPicPr>
+          <p:cNvPr id="13" name="Picture 12">
+            <a:extLst>
+              <a:ext uri="{FF2B5EF4-FFF2-40B4-BE49-F238E27FC236}">
+                <a16:creationId xmlns:a16="http://schemas.microsoft.com/office/drawing/2014/main" id="{355D812E-3C2A-BCEA-1442-B45EE486FA9C}"/>
+              </a:ext>
+            </a:extLst>
+          </p:cNvPr>
+          <p:cNvPicPr>
+            <a:picLocks noChangeAspect="1"/>
+          </p:cNvPicPr>
+          <p:nvPr/>
+        </p:nvPicPr>
+        <p:blipFill>
+          <a:blip r:embed="rId2"/>
+          <a:stretch>
+            <a:fillRect/>
+          </a:stretch>
+        </p:blipFill>
+        <p:spPr>
+          <a:xfrm>
+            <a:off x="7720500" y="933655"/>
+            <a:ext cx="1263120" cy="3753851"/>
+          </a:xfrm>
+          <a:prstGeom prst="rect">
+            <a:avLst/>
+          </a:prstGeom>
+        </p:spPr>
+      </p:pic>
+      <p:sp>
+        <p:nvSpPr>
+          <p:cNvPr id="8" name="Horizontal Scroll 15">
+            <a:extLst>
+              <a:ext uri="{FF2B5EF4-FFF2-40B4-BE49-F238E27FC236}">
+                <a16:creationId xmlns:a16="http://schemas.microsoft.com/office/drawing/2014/main" id="{510E2E53-03DD-57F0-F850-07FD9C250CEA}"/>
+              </a:ext>
+            </a:extLst>
+          </p:cNvPr>
+          <p:cNvSpPr/>
+          <p:nvPr/>
+        </p:nvSpPr>
+        <p:spPr>
+          <a:xfrm>
+            <a:off x="76200" y="-23210"/>
+            <a:ext cx="1265712" cy="762000"/>
+          </a:xfrm>
+          <a:prstGeom prst="horizontalScroll">
+            <a:avLst/>
+          </a:prstGeom>
+          <a:gradFill rotWithShape="1">
+            <a:gsLst>
+              <a:gs pos="0">
+                <a:srgbClr val="4F81BD">
+                  <a:tint val="50000"/>
+                  <a:satMod val="300000"/>
+                </a:srgbClr>
+              </a:gs>
+              <a:gs pos="35000">
+                <a:srgbClr val="4F81BD">
+                  <a:tint val="37000"/>
+                  <a:satMod val="300000"/>
+                </a:srgbClr>
+              </a:gs>
+              <a:gs pos="100000">
+                <a:srgbClr val="4F81BD">
+                  <a:tint val="15000"/>
+                  <a:satMod val="350000"/>
+                </a:srgbClr>
+              </a:gs>
+            </a:gsLst>
+            <a:lin ang="16200000" scaled="1"/>
+          </a:gradFill>
+          <a:ln w="9525" cap="flat" cmpd="sng" algn="ctr">
+            <a:solidFill>
+              <a:srgbClr val="4F81BD">
+                <a:shade val="95000"/>
+                <a:satMod val="105000"/>
+              </a:srgbClr>
+            </a:solidFill>
+            <a:prstDash val="solid"/>
+          </a:ln>
+          <a:effectLst>
+            <a:outerShdw blurRad="40000" dist="20000" dir="5400000" rotWithShape="0">
+              <a:srgbClr val="000000">
+                <a:alpha val="38000"/>
+              </a:srgbClr>
+            </a:outerShdw>
+          </a:effectLst>
+        </p:spPr>
+        <p:txBody>
+          <a:bodyPr rtlCol="0" anchor="ctr"/>
+          <a:lstStyle/>
+          <a:p>
+            <a:pPr marL="0" marR="0" lvl="0" indent="0" algn="ctr" defTabSz="457200" eaLnBrk="1" fontAlgn="auto" latinLnBrk="0" hangingPunct="1">
+              <a:lnSpc>
+                <a:spcPct val="100000"/>
+              </a:lnSpc>
+              <a:spcBef>
+                <a:spcPts val="0"/>
+              </a:spcBef>
+              <a:spcAft>
+                <a:spcPts val="0"/>
+              </a:spcAft>
+              <a:buClrTx/>
+              <a:buSzTx/>
+              <a:buFontTx/>
+              <a:buNone/>
+              <a:tabLst/>
+              <a:defRPr/>
+            </a:pPr>
+            <a:r>
+              <a:rPr kumimoji="0" lang="en-US" sz="2400" b="0" i="0" u="none" strike="noStrike" kern="0" cap="none" spc="0" normalizeH="0" baseline="0" noProof="0" dirty="0">
+                <a:ln>
+                  <a:noFill/>
+                </a:ln>
+                <a:solidFill>
+                  <a:prstClr val="black"/>
+                </a:solidFill>
+                <a:effectLst/>
+                <a:uLnTx/>
+                <a:uFillTx/>
+                <a:latin typeface="Calibri"/>
+                <a:ea typeface="+mn-ea"/>
+                <a:cs typeface="+mn-cs"/>
+              </a:rPr>
+              <a:t>Review</a:t>
+            </a:r>
+          </a:p>
+        </p:txBody>
+      </p:sp>
+    </p:spTree>
+    <p:extLst>
+      <p:ext uri="{BB962C8B-B14F-4D97-AF65-F5344CB8AC3E}">
+        <p14:creationId xmlns:p14="http://schemas.microsoft.com/office/powerpoint/2010/main" val="424972285"/>
+      </p:ext>
+    </p:extLst>
+  </p:cSld>
+  <p:clrMapOvr>
+    <a:masterClrMapping/>
+  </p:clrMapOvr>
+</p:sld>
+</file>
+
+<file path=ppt/slides/slide30.xml><?xml version="1.0" encoding="utf-8"?>
+<p:sld xmlns:a="http://schemas.openxmlformats.org/drawingml/2006/main" xmlns:r="http://schemas.openxmlformats.org/officeDocument/2006/relationships" xmlns:p="http://schemas.openxmlformats.org/presentationml/2006/main">
+  <p:cSld>
+    <p:spTree>
+      <p:nvGrpSpPr>
+        <p:cNvPr id="1" name=""/>
+        <p:cNvGrpSpPr/>
+        <p:nvPr/>
+      </p:nvGrpSpPr>
+      <p:grpSpPr>
+        <a:xfrm>
+          <a:off x="0" y="0"/>
+          <a:ext cx="0" cy="0"/>
+          <a:chOff x="0" y="0"/>
+          <a:chExt cx="0" cy="0"/>
+        </a:xfrm>
+      </p:grpSpPr>
+      <p:sp>
+        <p:nvSpPr>
           <p:cNvPr id="2" name="Title 1">
             <a:extLst>
               <a:ext uri="{FF2B5EF4-FFF2-40B4-BE49-F238E27FC236}">
@@ -27141,7 +28533,7 @@
             <a:fld id="{EA7C8D44-3667-46F6-9772-CC52308E2A7F}" type="slidenum">
               <a:rPr kumimoji="0" lang="en-US" smtClean="0"/>
               <a:pPr/>
-              <a:t>27</a:t>
+              <a:t>30</a:t>
             </a:fld>
             <a:endParaRPr kumimoji="0" lang="en-US" dirty="0"/>
           </a:p>
@@ -27997,7 +29389,7 @@
 </p:sld>
 </file>
 
-<file path=ppt/slides/slide28.xml><?xml version="1.0" encoding="utf-8"?>
+<file path=ppt/slides/slide31.xml><?xml version="1.0" encoding="utf-8"?>
 <p:sld xmlns:a="http://schemas.openxmlformats.org/drawingml/2006/main" xmlns:r="http://schemas.openxmlformats.org/officeDocument/2006/relationships" xmlns:p="http://schemas.openxmlformats.org/presentationml/2006/main">
   <p:cSld>
     <p:spTree>
@@ -28066,7 +29458,7 @@
             <a:fld id="{EA7C8D44-3667-46F6-9772-CC52308E2A7F}" type="slidenum">
               <a:rPr kumimoji="0" lang="en-US" smtClean="0"/>
               <a:pPr/>
-              <a:t>28</a:t>
+              <a:t>31</a:t>
             </a:fld>
             <a:endParaRPr kumimoji="0" lang="en-US" dirty="0"/>
           </a:p>
@@ -28795,7 +30187,7 @@
 </p:sld>
 </file>
 
-<file path=ppt/slides/slide29.xml><?xml version="1.0" encoding="utf-8"?>
+<file path=ppt/slides/slide32.xml><?xml version="1.0" encoding="utf-8"?>
 <p:sld xmlns:a="http://schemas.openxmlformats.org/drawingml/2006/main" xmlns:r="http://schemas.openxmlformats.org/officeDocument/2006/relationships" xmlns:p="http://schemas.openxmlformats.org/presentationml/2006/main">
   <p:cSld>
     <p:spTree>
@@ -28864,7 +30256,7 @@
             <a:fld id="{EA7C8D44-3667-46F6-9772-CC52308E2A7F}" type="slidenum">
               <a:rPr kumimoji="0" lang="en-US" smtClean="0"/>
               <a:pPr/>
-              <a:t>29</a:t>
+              <a:t>32</a:t>
             </a:fld>
             <a:endParaRPr kumimoji="0" lang="en-US" dirty="0"/>
           </a:p>
@@ -29552,765 +30944,7 @@
 </p:sld>
 </file>
 
-<file path=ppt/slides/slide3.xml><?xml version="1.0" encoding="utf-8"?>
-<p:sld xmlns:a="http://schemas.openxmlformats.org/drawingml/2006/main" xmlns:r="http://schemas.openxmlformats.org/officeDocument/2006/relationships" xmlns:p="http://schemas.openxmlformats.org/presentationml/2006/main">
-  <p:cSld>
-    <p:spTree>
-      <p:nvGrpSpPr>
-        <p:cNvPr id="1" name=""/>
-        <p:cNvGrpSpPr/>
-        <p:nvPr/>
-      </p:nvGrpSpPr>
-      <p:grpSpPr>
-        <a:xfrm>
-          <a:off x="0" y="0"/>
-          <a:ext cx="0" cy="0"/>
-          <a:chOff x="0" y="0"/>
-          <a:chExt cx="0" cy="0"/>
-        </a:xfrm>
-      </p:grpSpPr>
-      <p:sp>
-        <p:nvSpPr>
-          <p:cNvPr id="2" name="Title 1"/>
-          <p:cNvSpPr>
-            <a:spLocks noGrp="1"/>
-          </p:cNvSpPr>
-          <p:nvPr>
-            <p:ph type="title"/>
-          </p:nvPr>
-        </p:nvSpPr>
-        <p:spPr/>
-        <p:txBody>
-          <a:bodyPr/>
-          <a:lstStyle/>
-          <a:p>
-            <a:r>
-              <a:rPr lang="en-GB" dirty="0"/>
-              <a:t>Stack</a:t>
-            </a:r>
-          </a:p>
-        </p:txBody>
-      </p:sp>
-      <p:sp>
-        <p:nvSpPr>
-          <p:cNvPr id="3" name="Content Placeholder 2"/>
-          <p:cNvSpPr>
-            <a:spLocks noGrp="1"/>
-          </p:cNvSpPr>
-          <p:nvPr>
-            <p:ph idx="1"/>
-          </p:nvPr>
-        </p:nvSpPr>
-        <p:spPr/>
-        <p:txBody>
-          <a:bodyPr/>
-          <a:lstStyle/>
-          <a:p>
-            <a:pPr>
-              <a:buNone/>
-            </a:pPr>
-            <a:r>
-              <a:rPr lang="en-GB" sz="2100" b="1" dirty="0">
-                <a:solidFill>
-                  <a:srgbClr val="FF0000"/>
-                </a:solidFill>
-                <a:latin typeface="Consolas" panose="020B0609020204030204" pitchFamily="49" charset="0"/>
-                <a:cs typeface="Consolas" panose="020B0609020204030204" pitchFamily="49" charset="0"/>
-              </a:rPr>
-              <a:t>POP</a:t>
-            </a:r>
-            <a:r>
-              <a:rPr lang="en-GB" sz="2100" dirty="0">
-                <a:solidFill>
-                  <a:srgbClr val="FF0000"/>
-                </a:solidFill>
-                <a:latin typeface="Consolas" panose="020B0609020204030204" pitchFamily="49" charset="0"/>
-                <a:cs typeface="Consolas" panose="020B0609020204030204" pitchFamily="49" charset="0"/>
-              </a:rPr>
-              <a:t> </a:t>
-            </a:r>
-            <a:r>
-              <a:rPr lang="en-GB" sz="2100" dirty="0">
-                <a:latin typeface="Consolas" panose="020B0609020204030204" pitchFamily="49" charset="0"/>
-                <a:cs typeface="Consolas" panose="020B0609020204030204" pitchFamily="49" charset="0"/>
-              </a:rPr>
-              <a:t>{</a:t>
-            </a:r>
-            <a:r>
-              <a:rPr lang="en-GB" sz="2100" i="1" dirty="0">
-                <a:latin typeface="Consolas" panose="020B0609020204030204" pitchFamily="49" charset="0"/>
-                <a:cs typeface="Consolas" panose="020B0609020204030204" pitchFamily="49" charset="0"/>
-              </a:rPr>
-              <a:t>Rd</a:t>
-            </a:r>
-            <a:r>
-              <a:rPr lang="en-GB" sz="2100" dirty="0">
-                <a:latin typeface="Consolas" panose="020B0609020204030204" pitchFamily="49" charset="0"/>
-                <a:cs typeface="Consolas" panose="020B0609020204030204" pitchFamily="49" charset="0"/>
-              </a:rPr>
-              <a:t>} == LDMIA SP!, {Rd} == LDMFD SP!, {Rd}</a:t>
-            </a:r>
-          </a:p>
-          <a:p>
-            <a:pPr lvl="1"/>
-            <a:r>
-              <a:rPr lang="sv-SE" sz="1800" dirty="0">
-                <a:latin typeface="Consolas" panose="020B0609020204030204" pitchFamily="49" charset="0"/>
-                <a:cs typeface="Consolas" panose="020B0609020204030204" pitchFamily="49" charset="0"/>
-              </a:rPr>
-              <a:t>LDR Rd, [SP] @ </a:t>
-            </a:r>
-            <a:r>
-              <a:rPr lang="en-GB" sz="1800" dirty="0">
-                <a:latin typeface="Consolas" panose="020B0609020204030204" pitchFamily="49" charset="0"/>
-                <a:cs typeface="Consolas" panose="020B0609020204030204" pitchFamily="49" charset="0"/>
-              </a:rPr>
-              <a:t>Rd = (*SP)    </a:t>
-            </a:r>
-            <a:r>
-              <a:rPr lang="en-GB" sz="1800" dirty="0">
-                <a:latin typeface="Cambria Math"/>
-                <a:ea typeface="Cambria Math"/>
-                <a:cs typeface="Consolas" panose="020B0609020204030204" pitchFamily="49" charset="0"/>
-              </a:rPr>
-              <a:t>(full stack)</a:t>
-            </a:r>
-            <a:endParaRPr lang="en-GB" sz="1800" dirty="0">
-              <a:latin typeface="Consolas" panose="020B0609020204030204" pitchFamily="49" charset="0"/>
-              <a:cs typeface="Consolas" panose="020B0609020204030204" pitchFamily="49" charset="0"/>
-            </a:endParaRPr>
-          </a:p>
-          <a:p>
-            <a:pPr lvl="1"/>
-            <a:r>
-              <a:rPr lang="en-GB" sz="1800" dirty="0">
-                <a:latin typeface="Consolas" panose="020B0609020204030204" pitchFamily="49" charset="0"/>
-                <a:cs typeface="Consolas" panose="020B0609020204030204" pitchFamily="49" charset="0"/>
-              </a:rPr>
-              <a:t>ADD SP, #4   </a:t>
-            </a:r>
-            <a:r>
-              <a:rPr lang="sv-SE" sz="1800" dirty="0">
-                <a:latin typeface="Consolas" panose="020B0609020204030204" pitchFamily="49" charset="0"/>
-                <a:cs typeface="Consolas" panose="020B0609020204030204" pitchFamily="49" charset="0"/>
-              </a:rPr>
-              <a:t>@ </a:t>
-            </a:r>
-            <a:r>
-              <a:rPr lang="en-GB" sz="1800" dirty="0">
-                <a:latin typeface="Consolas" panose="020B0609020204030204" pitchFamily="49" charset="0"/>
-                <a:cs typeface="Consolas" panose="020B0609020204030204" pitchFamily="49" charset="0"/>
-              </a:rPr>
-              <a:t>SP = SP + 4   </a:t>
-            </a:r>
-            <a:r>
-              <a:rPr lang="en-GB" sz="1800" dirty="0">
-                <a:latin typeface="Cambria Math"/>
-                <a:ea typeface="Cambria Math"/>
-                <a:cs typeface="Consolas" panose="020B0609020204030204" pitchFamily="49" charset="0"/>
-              </a:rPr>
-              <a:t>(Stack shrinks)</a:t>
-            </a:r>
-          </a:p>
-          <a:p>
-            <a:pPr lvl="1"/>
-            <a:endParaRPr lang="en-GB" sz="2025" dirty="0">
-              <a:latin typeface="Consolas" panose="020B0609020204030204" pitchFamily="49" charset="0"/>
-              <a:cs typeface="Consolas" panose="020B0609020204030204" pitchFamily="49" charset="0"/>
-            </a:endParaRPr>
-          </a:p>
-          <a:p>
-            <a:pPr marL="0" indent="0">
-              <a:buNone/>
-            </a:pPr>
-            <a:r>
-              <a:rPr lang="en-GB" sz="2025" dirty="0">
-                <a:cs typeface="Consolas" panose="020B0609020204030204" pitchFamily="49" charset="0"/>
-              </a:rPr>
-              <a:t>Pop multiple registers</a:t>
-            </a:r>
-          </a:p>
-        </p:txBody>
-      </p:sp>
-      <p:sp>
-        <p:nvSpPr>
-          <p:cNvPr id="4" name="Slide Number Placeholder 3"/>
-          <p:cNvSpPr>
-            <a:spLocks noGrp="1"/>
-          </p:cNvSpPr>
-          <p:nvPr>
-            <p:ph type="sldNum" sz="quarter" idx="12"/>
-          </p:nvPr>
-        </p:nvSpPr>
-        <p:spPr/>
-        <p:txBody>
-          <a:bodyPr/>
-          <a:lstStyle/>
-          <a:p>
-            <a:pPr defTabSz="685800"/>
-            <a:fld id="{EA7C8D44-3667-46F6-9772-CC52308E2A7F}" type="slidenum">
-              <a:rPr lang="en-US">
-                <a:solidFill>
-                  <a:srgbClr val="1F497D"/>
-                </a:solidFill>
-                <a:latin typeface="Gill Sans MT"/>
-              </a:rPr>
-              <a:pPr defTabSz="685800"/>
-              <a:t>3</a:t>
-            </a:fld>
-            <a:endParaRPr lang="en-US" dirty="0">
-              <a:solidFill>
-                <a:srgbClr val="1F497D"/>
-              </a:solidFill>
-              <a:latin typeface="Gill Sans MT"/>
-            </a:endParaRPr>
-          </a:p>
-        </p:txBody>
-      </p:sp>
-      <p:sp>
-        <p:nvSpPr>
-          <p:cNvPr id="5" name="Rectangle 4"/>
-          <p:cNvSpPr/>
-          <p:nvPr/>
-        </p:nvSpPr>
-        <p:spPr>
-          <a:xfrm>
-            <a:off x="3629026" y="4075262"/>
-            <a:ext cx="2025632" cy="507831"/>
-          </a:xfrm>
-          <a:prstGeom prst="rect">
-            <a:avLst/>
-          </a:prstGeom>
-        </p:spPr>
-        <p:txBody>
-          <a:bodyPr wrap="square">
-            <a:spAutoFit/>
-          </a:bodyPr>
-          <a:lstStyle/>
-          <a:p>
-            <a:pPr defTabSz="685800"/>
-            <a:r>
-              <a:rPr lang="en-GB" sz="1350" b="1" dirty="0">
-                <a:solidFill>
-                  <a:srgbClr val="FF0000"/>
-                </a:solidFill>
-                <a:latin typeface="Consolas" panose="020B0609020204030204" pitchFamily="49" charset="0"/>
-                <a:cs typeface="Consolas" panose="020B0609020204030204" pitchFamily="49" charset="0"/>
-              </a:rPr>
-              <a:t>POP {r7, r3, r2, r1}</a:t>
-            </a:r>
-          </a:p>
-        </p:txBody>
-      </p:sp>
-      <p:sp>
-        <p:nvSpPr>
-          <p:cNvPr id="7" name="TextBox 6"/>
-          <p:cNvSpPr txBox="1"/>
-          <p:nvPr/>
-        </p:nvSpPr>
-        <p:spPr>
-          <a:xfrm>
-            <a:off x="3744661" y="3763639"/>
-            <a:ext cx="1521827" cy="300082"/>
-          </a:xfrm>
-          <a:prstGeom prst="rect">
-            <a:avLst/>
-          </a:prstGeom>
-          <a:noFill/>
-        </p:spPr>
-        <p:txBody>
-          <a:bodyPr wrap="none" rtlCol="0">
-            <a:spAutoFit/>
-          </a:bodyPr>
-          <a:lstStyle/>
-          <a:p>
-            <a:pPr defTabSz="685800"/>
-            <a:r>
-              <a:rPr lang="en-US" sz="1350" i="1" dirty="0">
-                <a:solidFill>
-                  <a:prstClr val="black"/>
-                </a:solidFill>
-                <a:latin typeface="Gill Sans MT"/>
-              </a:rPr>
-              <a:t>They are equivalent. </a:t>
-            </a:r>
-          </a:p>
-        </p:txBody>
-      </p:sp>
-      <p:sp>
-        <p:nvSpPr>
-          <p:cNvPr id="9" name="Rectangle 8"/>
-          <p:cNvSpPr/>
-          <p:nvPr/>
-        </p:nvSpPr>
-        <p:spPr>
-          <a:xfrm>
-            <a:off x="6224130" y="3763639"/>
-            <a:ext cx="941283" cy="923330"/>
-          </a:xfrm>
-          <a:prstGeom prst="rect">
-            <a:avLst/>
-          </a:prstGeom>
-        </p:spPr>
-        <p:txBody>
-          <a:bodyPr wrap="none">
-            <a:spAutoFit/>
-          </a:bodyPr>
-          <a:lstStyle/>
-          <a:p>
-            <a:pPr defTabSz="685800"/>
-            <a:r>
-              <a:rPr lang="en-GB" sz="1350" b="1" dirty="0">
-                <a:solidFill>
-                  <a:srgbClr val="FF0000"/>
-                </a:solidFill>
-                <a:latin typeface="Consolas" panose="020B0609020204030204" pitchFamily="49" charset="0"/>
-                <a:cs typeface="Consolas" panose="020B0609020204030204" pitchFamily="49" charset="0"/>
-              </a:rPr>
-              <a:t>POP {r1}</a:t>
-            </a:r>
-          </a:p>
-          <a:p>
-            <a:pPr defTabSz="685800"/>
-            <a:r>
-              <a:rPr lang="en-GB" sz="1350" b="1" dirty="0">
-                <a:solidFill>
-                  <a:srgbClr val="FF0000"/>
-                </a:solidFill>
-                <a:latin typeface="Consolas" panose="020B0609020204030204" pitchFamily="49" charset="0"/>
-                <a:cs typeface="Consolas" panose="020B0609020204030204" pitchFamily="49" charset="0"/>
-              </a:rPr>
-              <a:t>POP {r2}</a:t>
-            </a:r>
-          </a:p>
-          <a:p>
-            <a:pPr defTabSz="685800"/>
-            <a:r>
-              <a:rPr lang="en-GB" sz="1350" b="1" dirty="0">
-                <a:solidFill>
-                  <a:srgbClr val="FF0000"/>
-                </a:solidFill>
-                <a:latin typeface="Consolas" panose="020B0609020204030204" pitchFamily="49" charset="0"/>
-                <a:cs typeface="Consolas" panose="020B0609020204030204" pitchFamily="49" charset="0"/>
-              </a:rPr>
-              <a:t>POP {r3}</a:t>
-            </a:r>
-          </a:p>
-          <a:p>
-            <a:pPr defTabSz="685800"/>
-            <a:r>
-              <a:rPr lang="en-GB" sz="1350" b="1" dirty="0">
-                <a:solidFill>
-                  <a:srgbClr val="FF0000"/>
-                </a:solidFill>
-                <a:latin typeface="Consolas" panose="020B0609020204030204" pitchFamily="49" charset="0"/>
-                <a:cs typeface="Consolas" panose="020B0609020204030204" pitchFamily="49" charset="0"/>
-              </a:rPr>
-              <a:t>POP {r7}</a:t>
-            </a:r>
-          </a:p>
-        </p:txBody>
-      </p:sp>
-      <p:sp>
-        <p:nvSpPr>
-          <p:cNvPr id="10" name="Rectangle 9"/>
-          <p:cNvSpPr/>
-          <p:nvPr/>
-        </p:nvSpPr>
-        <p:spPr>
-          <a:xfrm>
-            <a:off x="1125325" y="4075262"/>
-            <a:ext cx="2076209" cy="300082"/>
-          </a:xfrm>
-          <a:prstGeom prst="rect">
-            <a:avLst/>
-          </a:prstGeom>
-        </p:spPr>
-        <p:txBody>
-          <a:bodyPr wrap="none">
-            <a:spAutoFit/>
-          </a:bodyPr>
-          <a:lstStyle/>
-          <a:p>
-            <a:pPr defTabSz="685800"/>
-            <a:r>
-              <a:rPr lang="en-GB" sz="1350" b="1" dirty="0">
-                <a:solidFill>
-                  <a:srgbClr val="FF0000"/>
-                </a:solidFill>
-                <a:latin typeface="Consolas" panose="020B0609020204030204" pitchFamily="49" charset="0"/>
-                <a:cs typeface="Consolas" panose="020B0609020204030204" pitchFamily="49" charset="0"/>
-              </a:rPr>
-              <a:t>POP {r1, r2, r3, r7}</a:t>
-            </a:r>
-          </a:p>
-        </p:txBody>
-      </p:sp>
-      <p:sp>
-        <p:nvSpPr>
-          <p:cNvPr id="11" name="Left-Right Arrow 10"/>
-          <p:cNvSpPr/>
-          <p:nvPr/>
-        </p:nvSpPr>
-        <p:spPr>
-          <a:xfrm>
-            <a:off x="3213091" y="4139556"/>
-            <a:ext cx="362213" cy="148412"/>
-          </a:xfrm>
-          <a:prstGeom prst="leftRightArrow">
-            <a:avLst/>
-          </a:prstGeom>
-        </p:spPr>
-        <p:style>
-          <a:lnRef idx="2">
-            <a:schemeClr val="accent1">
-              <a:shade val="50000"/>
-            </a:schemeClr>
-          </a:lnRef>
-          <a:fillRef idx="1">
-            <a:schemeClr val="accent1"/>
-          </a:fillRef>
-          <a:effectRef idx="0">
-            <a:schemeClr val="accent1"/>
-          </a:effectRef>
-          <a:fontRef idx="minor">
-            <a:schemeClr val="lt1"/>
-          </a:fontRef>
-        </p:style>
-        <p:txBody>
-          <a:bodyPr rtlCol="0" anchor="ctr"/>
-          <a:lstStyle/>
-          <a:p>
-            <a:pPr algn="ctr" defTabSz="685800"/>
-            <a:endParaRPr lang="en-US" sz="1350">
-              <a:solidFill>
-                <a:prstClr val="white"/>
-              </a:solidFill>
-              <a:latin typeface="Gill Sans MT"/>
-            </a:endParaRPr>
-          </a:p>
-        </p:txBody>
-      </p:sp>
-      <p:sp>
-        <p:nvSpPr>
-          <p:cNvPr id="12" name="Left-Right Arrow 11"/>
-          <p:cNvSpPr/>
-          <p:nvPr/>
-        </p:nvSpPr>
-        <p:spPr>
-          <a:xfrm>
-            <a:off x="5670541" y="4139556"/>
-            <a:ext cx="362213" cy="148412"/>
-          </a:xfrm>
-          <a:prstGeom prst="leftRightArrow">
-            <a:avLst/>
-          </a:prstGeom>
-        </p:spPr>
-        <p:style>
-          <a:lnRef idx="2">
-            <a:schemeClr val="accent1">
-              <a:shade val="50000"/>
-            </a:schemeClr>
-          </a:lnRef>
-          <a:fillRef idx="1">
-            <a:schemeClr val="accent1"/>
-          </a:fillRef>
-          <a:effectRef idx="0">
-            <a:schemeClr val="accent1"/>
-          </a:effectRef>
-          <a:fontRef idx="minor">
-            <a:schemeClr val="lt1"/>
-          </a:fontRef>
-        </p:style>
-        <p:txBody>
-          <a:bodyPr rtlCol="0" anchor="ctr"/>
-          <a:lstStyle/>
-          <a:p>
-            <a:pPr algn="ctr" defTabSz="685800"/>
-            <a:endParaRPr lang="en-US" sz="1350">
-              <a:solidFill>
-                <a:prstClr val="white"/>
-              </a:solidFill>
-              <a:latin typeface="Gill Sans MT"/>
-            </a:endParaRPr>
-          </a:p>
-        </p:txBody>
-      </p:sp>
-      <p:sp>
-        <p:nvSpPr>
-          <p:cNvPr id="6" name="Rectangle 5"/>
-          <p:cNvSpPr/>
-          <p:nvPr/>
-        </p:nvSpPr>
-        <p:spPr>
-          <a:xfrm>
-            <a:off x="441316" y="4663886"/>
-            <a:ext cx="8401050" cy="1015663"/>
-          </a:xfrm>
-          <a:prstGeom prst="rect">
-            <a:avLst/>
-          </a:prstGeom>
-        </p:spPr>
-        <p:txBody>
-          <a:bodyPr wrap="square">
-            <a:spAutoFit/>
-          </a:bodyPr>
-          <a:lstStyle/>
-          <a:p>
-            <a:pPr marL="214313" indent="-214313" defTabSz="685800">
-              <a:buFont typeface="Arial" panose="020B0604020202020204" pitchFamily="34" charset="0"/>
-              <a:buChar char="•"/>
-            </a:pPr>
-            <a:r>
-              <a:rPr lang="en-US" sz="1500" dirty="0">
-                <a:solidFill>
-                  <a:prstClr val="black"/>
-                </a:solidFill>
-                <a:latin typeface="Gill Sans MT"/>
-              </a:rPr>
-              <a:t>SP is incremented after POP (post-increment). </a:t>
-            </a:r>
-          </a:p>
-          <a:p>
-            <a:pPr marL="214313" indent="-214313" defTabSz="685800">
-              <a:buFont typeface="Arial" panose="020B0604020202020204" pitchFamily="34" charset="0"/>
-              <a:buChar char="•"/>
-            </a:pPr>
-            <a:r>
-              <a:rPr lang="en-US" sz="1500" dirty="0">
-                <a:solidFill>
-                  <a:prstClr val="black"/>
-                </a:solidFill>
-                <a:latin typeface="Gill Sans MT"/>
-              </a:rPr>
-              <a:t>The order in which registers listed in the register list does not matter. </a:t>
-            </a:r>
-          </a:p>
-          <a:p>
-            <a:pPr marL="214313" indent="-214313" defTabSz="685800">
-              <a:buFont typeface="Arial" panose="020B0604020202020204" pitchFamily="34" charset="0"/>
-              <a:buChar char="•"/>
-            </a:pPr>
-            <a:r>
-              <a:rPr lang="en-US" sz="1500" dirty="0">
-                <a:solidFill>
-                  <a:prstClr val="black"/>
-                </a:solidFill>
-                <a:latin typeface="Gill Sans MT"/>
-              </a:rPr>
-              <a:t>When popping multiple registers, these registers are automatically </a:t>
-            </a:r>
-            <a:r>
-              <a:rPr lang="en-US" sz="1500" dirty="0">
-                <a:solidFill>
-                  <a:srgbClr val="3333FF"/>
-                </a:solidFill>
-                <a:latin typeface="Gill Sans MT"/>
-              </a:rPr>
-              <a:t>sorted by name </a:t>
-            </a:r>
-            <a:r>
-              <a:rPr lang="en-US" sz="1500" dirty="0">
-                <a:solidFill>
-                  <a:prstClr val="black"/>
-                </a:solidFill>
-                <a:latin typeface="Gill Sans MT"/>
-              </a:rPr>
-              <a:t>and </a:t>
-            </a:r>
-            <a:r>
-              <a:rPr lang="en-US" sz="1500" dirty="0">
-                <a:solidFill>
-                  <a:srgbClr val="3333FF"/>
-                </a:solidFill>
-                <a:latin typeface="Gill Sans MT"/>
-              </a:rPr>
-              <a:t>the lowest-numbered register</a:t>
-            </a:r>
-            <a:r>
-              <a:rPr lang="en-US" sz="1500" dirty="0">
-                <a:solidFill>
-                  <a:prstClr val="black"/>
-                </a:solidFill>
-                <a:latin typeface="Gill Sans MT"/>
-              </a:rPr>
-              <a:t> is loaded from the lowest memory address, </a:t>
-            </a:r>
-            <a:r>
-              <a:rPr lang="en-US" sz="1500" i="1" dirty="0">
-                <a:solidFill>
-                  <a:prstClr val="black"/>
-                </a:solidFill>
-                <a:latin typeface="Gill Sans MT"/>
-              </a:rPr>
-              <a:t>i.e. </a:t>
-            </a:r>
-            <a:r>
-              <a:rPr lang="en-US" sz="1500" dirty="0">
-                <a:solidFill>
-                  <a:srgbClr val="3333FF"/>
-                </a:solidFill>
-                <a:latin typeface="Gill Sans MT"/>
-              </a:rPr>
-              <a:t>is loaded first</a:t>
-            </a:r>
-            <a:r>
-              <a:rPr lang="en-US" sz="1500" dirty="0">
-                <a:solidFill>
-                  <a:prstClr val="black"/>
-                </a:solidFill>
-                <a:latin typeface="Gill Sans MT"/>
-              </a:rPr>
-              <a:t>. </a:t>
-            </a:r>
-          </a:p>
-        </p:txBody>
-      </p:sp>
-      <p:pic>
-        <p:nvPicPr>
-          <p:cNvPr id="13" name="Picture 12">
-            <a:extLst>
-              <a:ext uri="{FF2B5EF4-FFF2-40B4-BE49-F238E27FC236}">
-                <a16:creationId xmlns:a16="http://schemas.microsoft.com/office/drawing/2014/main" id="{355D812E-3C2A-BCEA-1442-B45EE486FA9C}"/>
-              </a:ext>
-            </a:extLst>
-          </p:cNvPr>
-          <p:cNvPicPr>
-            <a:picLocks noChangeAspect="1"/>
-          </p:cNvPicPr>
-          <p:nvPr/>
-        </p:nvPicPr>
-        <p:blipFill>
-          <a:blip r:embed="rId2"/>
-          <a:stretch>
-            <a:fillRect/>
-          </a:stretch>
-        </p:blipFill>
-        <p:spPr>
-          <a:xfrm>
-            <a:off x="7720500" y="933655"/>
-            <a:ext cx="1263120" cy="3753851"/>
-          </a:xfrm>
-          <a:prstGeom prst="rect">
-            <a:avLst/>
-          </a:prstGeom>
-        </p:spPr>
-      </p:pic>
-      <p:sp>
-        <p:nvSpPr>
-          <p:cNvPr id="8" name="Horizontal Scroll 15">
-            <a:extLst>
-              <a:ext uri="{FF2B5EF4-FFF2-40B4-BE49-F238E27FC236}">
-                <a16:creationId xmlns:a16="http://schemas.microsoft.com/office/drawing/2014/main" id="{510E2E53-03DD-57F0-F850-07FD9C250CEA}"/>
-              </a:ext>
-            </a:extLst>
-          </p:cNvPr>
-          <p:cNvSpPr/>
-          <p:nvPr/>
-        </p:nvSpPr>
-        <p:spPr>
-          <a:xfrm>
-            <a:off x="76200" y="-23210"/>
-            <a:ext cx="1265712" cy="762000"/>
-          </a:xfrm>
-          <a:prstGeom prst="horizontalScroll">
-            <a:avLst/>
-          </a:prstGeom>
-          <a:gradFill rotWithShape="1">
-            <a:gsLst>
-              <a:gs pos="0">
-                <a:srgbClr val="4F81BD">
-                  <a:tint val="50000"/>
-                  <a:satMod val="300000"/>
-                </a:srgbClr>
-              </a:gs>
-              <a:gs pos="35000">
-                <a:srgbClr val="4F81BD">
-                  <a:tint val="37000"/>
-                  <a:satMod val="300000"/>
-                </a:srgbClr>
-              </a:gs>
-              <a:gs pos="100000">
-                <a:srgbClr val="4F81BD">
-                  <a:tint val="15000"/>
-                  <a:satMod val="350000"/>
-                </a:srgbClr>
-              </a:gs>
-            </a:gsLst>
-            <a:lin ang="16200000" scaled="1"/>
-          </a:gradFill>
-          <a:ln w="9525" cap="flat" cmpd="sng" algn="ctr">
-            <a:solidFill>
-              <a:srgbClr val="4F81BD">
-                <a:shade val="95000"/>
-                <a:satMod val="105000"/>
-              </a:srgbClr>
-            </a:solidFill>
-            <a:prstDash val="solid"/>
-          </a:ln>
-          <a:effectLst>
-            <a:outerShdw blurRad="40000" dist="20000" dir="5400000" rotWithShape="0">
-              <a:srgbClr val="000000">
-                <a:alpha val="38000"/>
-              </a:srgbClr>
-            </a:outerShdw>
-          </a:effectLst>
-        </p:spPr>
-        <p:txBody>
-          <a:bodyPr rtlCol="0" anchor="ctr"/>
-          <a:lstStyle/>
-          <a:p>
-            <a:pPr marL="0" marR="0" lvl="0" indent="0" algn="ctr" defTabSz="457200" eaLnBrk="1" fontAlgn="auto" latinLnBrk="0" hangingPunct="1">
-              <a:lnSpc>
-                <a:spcPct val="100000"/>
-              </a:lnSpc>
-              <a:spcBef>
-                <a:spcPts val="0"/>
-              </a:spcBef>
-              <a:spcAft>
-                <a:spcPts val="0"/>
-              </a:spcAft>
-              <a:buClrTx/>
-              <a:buSzTx/>
-              <a:buFontTx/>
-              <a:buNone/>
-              <a:tabLst/>
-              <a:defRPr/>
-            </a:pPr>
-            <a:r>
-              <a:rPr kumimoji="0" lang="en-US" sz="2400" b="0" i="0" u="none" strike="noStrike" kern="0" cap="none" spc="0" normalizeH="0" baseline="0" noProof="0" dirty="0">
-                <a:ln>
-                  <a:noFill/>
-                </a:ln>
-                <a:solidFill>
-                  <a:prstClr val="black"/>
-                </a:solidFill>
-                <a:effectLst/>
-                <a:uLnTx/>
-                <a:uFillTx/>
-                <a:latin typeface="Calibri"/>
-                <a:ea typeface="+mn-ea"/>
-                <a:cs typeface="+mn-cs"/>
-              </a:rPr>
-              <a:t>Review</a:t>
-            </a:r>
-          </a:p>
-        </p:txBody>
-      </p:sp>
-    </p:spTree>
-    <p:extLst>
-      <p:ext uri="{BB962C8B-B14F-4D97-AF65-F5344CB8AC3E}">
-        <p14:creationId xmlns:p14="http://schemas.microsoft.com/office/powerpoint/2010/main" val="424972285"/>
-      </p:ext>
-    </p:extLst>
-  </p:cSld>
-  <p:clrMapOvr>
-    <a:masterClrMapping/>
-  </p:clrMapOvr>
-</p:sld>
-</file>
-
-<file path=ppt/slides/slide30.xml><?xml version="1.0" encoding="utf-8"?>
+<file path=ppt/slides/slide33.xml><?xml version="1.0" encoding="utf-8"?>
 <p:sld xmlns:a="http://schemas.openxmlformats.org/drawingml/2006/main" xmlns:r="http://schemas.openxmlformats.org/officeDocument/2006/relationships" xmlns:p="http://schemas.openxmlformats.org/presentationml/2006/main">
   <p:cSld>
     <p:spTree>
@@ -30385,7 +31019,7 @@
             <a:fld id="{EA7C8D44-3667-46F6-9772-CC52308E2A7F}" type="slidenum">
               <a:rPr kumimoji="0" lang="en-US" smtClean="0"/>
               <a:pPr/>
-              <a:t>30</a:t>
+              <a:t>33</a:t>
             </a:fld>
             <a:endParaRPr kumimoji="0" lang="en-US" dirty="0"/>
           </a:p>
@@ -31223,7 +31857,7 @@
 </p:sld>
 </file>
 
-<file path=ppt/slides/slide31.xml><?xml version="1.0" encoding="utf-8"?>
+<file path=ppt/slides/slide34.xml><?xml version="1.0" encoding="utf-8"?>
 <p:sld xmlns:a="http://schemas.openxmlformats.org/drawingml/2006/main" xmlns:r="http://schemas.openxmlformats.org/officeDocument/2006/relationships" xmlns:p="http://schemas.openxmlformats.org/presentationml/2006/main">
   <p:cSld>
     <p:spTree>
@@ -31294,7 +31928,7 @@
             <a:fld id="{EA7C8D44-3667-46F6-9772-CC52308E2A7F}" type="slidenum">
               <a:rPr kumimoji="0" lang="en-US" smtClean="0"/>
               <a:pPr/>
-              <a:t>31</a:t>
+              <a:t>34</a:t>
             </a:fld>
             <a:endParaRPr kumimoji="0" lang="en-US" dirty="0"/>
           </a:p>
@@ -31898,7 +32532,7 @@
 </p:sld>
 </file>
 
-<file path=ppt/slides/slide32.xml><?xml version="1.0" encoding="utf-8"?>
+<file path=ppt/slides/slide35.xml><?xml version="1.0" encoding="utf-8"?>
 <p:sld xmlns:a="http://schemas.openxmlformats.org/drawingml/2006/main" xmlns:r="http://schemas.openxmlformats.org/officeDocument/2006/relationships" xmlns:p="http://schemas.openxmlformats.org/presentationml/2006/main">
   <p:cSld>
     <p:spTree>
@@ -31969,7 +32603,7 @@
             <a:fld id="{EA7C8D44-3667-46F6-9772-CC52308E2A7F}" type="slidenum">
               <a:rPr kumimoji="0" lang="en-US" smtClean="0"/>
               <a:pPr/>
-              <a:t>32</a:t>
+              <a:t>35</a:t>
             </a:fld>
             <a:endParaRPr kumimoji="0" lang="en-US" dirty="0"/>
           </a:p>
@@ -32945,941 +33579,6 @@
 </p:sld>
 </file>
 
-<file path=ppt/slides/slide33.xml><?xml version="1.0" encoding="utf-8"?>
-<p:sld xmlns:a="http://schemas.openxmlformats.org/drawingml/2006/main" xmlns:r="http://schemas.openxmlformats.org/officeDocument/2006/relationships" xmlns:p="http://schemas.openxmlformats.org/presentationml/2006/main">
-  <p:cSld>
-    <p:spTree>
-      <p:nvGrpSpPr>
-        <p:cNvPr id="1" name=""/>
-        <p:cNvGrpSpPr/>
-        <p:nvPr/>
-      </p:nvGrpSpPr>
-      <p:grpSpPr>
-        <a:xfrm>
-          <a:off x="0" y="0"/>
-          <a:ext cx="0" cy="0"/>
-          <a:chOff x="0" y="0"/>
-          <a:chExt cx="0" cy="0"/>
-        </a:xfrm>
-      </p:grpSpPr>
-      <p:sp>
-        <p:nvSpPr>
-          <p:cNvPr id="2" name="Title 1">
-            <a:extLst>
-              <a:ext uri="{FF2B5EF4-FFF2-40B4-BE49-F238E27FC236}">
-                <a16:creationId xmlns:a16="http://schemas.microsoft.com/office/drawing/2014/main" id="{0B680E2F-C62E-EF54-5DBD-340196E1CA5F}"/>
-              </a:ext>
-            </a:extLst>
-          </p:cNvPr>
-          <p:cNvSpPr>
-            <a:spLocks noGrp="1"/>
-          </p:cNvSpPr>
-          <p:nvPr>
-            <p:ph type="title"/>
-          </p:nvPr>
-        </p:nvSpPr>
-        <p:spPr/>
-        <p:txBody>
-          <a:bodyPr/>
-          <a:lstStyle/>
-          <a:p>
-            <a:r>
-              <a:rPr lang="en-US" dirty="0"/>
-              <a:t>Explanations</a:t>
-            </a:r>
-          </a:p>
-        </p:txBody>
-      </p:sp>
-      <p:sp>
-        <p:nvSpPr>
-          <p:cNvPr id="3" name="Slide Number Placeholder 2">
-            <a:extLst>
-              <a:ext uri="{FF2B5EF4-FFF2-40B4-BE49-F238E27FC236}">
-                <a16:creationId xmlns:a16="http://schemas.microsoft.com/office/drawing/2014/main" id="{9ECF1D85-43EB-71B3-363D-9FF339EE4AA2}"/>
-              </a:ext>
-            </a:extLst>
-          </p:cNvPr>
-          <p:cNvSpPr>
-            <a:spLocks noGrp="1"/>
-          </p:cNvSpPr>
-          <p:nvPr>
-            <p:ph type="sldNum" sz="quarter" idx="12"/>
-          </p:nvPr>
-        </p:nvSpPr>
-        <p:spPr/>
-        <p:txBody>
-          <a:bodyPr/>
-          <a:lstStyle/>
-          <a:p>
-            <a:fld id="{EA7C8D44-3667-46F6-9772-CC52308E2A7F}" type="slidenum">
-              <a:rPr kumimoji="0" lang="en-US" smtClean="0"/>
-              <a:pPr/>
-              <a:t>33</a:t>
-            </a:fld>
-            <a:endParaRPr kumimoji="0" lang="en-US" dirty="0"/>
-          </a:p>
-        </p:txBody>
-      </p:sp>
-      <p:sp>
-        <p:nvSpPr>
-          <p:cNvPr id="4" name="Content Placeholder 3">
-            <a:extLst>
-              <a:ext uri="{FF2B5EF4-FFF2-40B4-BE49-F238E27FC236}">
-                <a16:creationId xmlns:a16="http://schemas.microsoft.com/office/drawing/2014/main" id="{E4F57FE1-A328-6D2A-AFB7-A6C1600FE210}"/>
-              </a:ext>
-            </a:extLst>
-          </p:cNvPr>
-          <p:cNvSpPr>
-            <a:spLocks noGrp="1"/>
-          </p:cNvSpPr>
-          <p:nvPr>
-            <p:ph sz="quarter" idx="1"/>
-          </p:nvPr>
-        </p:nvSpPr>
-        <p:spPr>
-          <a:xfrm>
-            <a:off x="457200" y="1219200"/>
-            <a:ext cx="8229600" cy="5334000"/>
-          </a:xfrm>
-        </p:spPr>
-        <p:txBody>
-          <a:bodyPr>
-            <a:normAutofit fontScale="70000" lnSpcReduction="20000"/>
-          </a:bodyPr>
-          <a:lstStyle/>
-          <a:p>
-            <a:r>
-              <a:rPr lang="en-US" dirty="0"/>
-              <a:t>These two lines sign-extend the lower 16 bits of r3 into a full 32-bit value in r0.</a:t>
-            </a:r>
-          </a:p>
-          <a:p>
-            <a:r>
-              <a:rPr lang="en-US" dirty="0"/>
-              <a:t>MOV r0, r3, LSL #16</a:t>
-            </a:r>
-          </a:p>
-          <a:p>
-            <a:pPr lvl="1"/>
-            <a:r>
-              <a:rPr lang="en-US" dirty="0"/>
-              <a:t>Shifts the value in r3 left by 16 bits.</a:t>
-            </a:r>
-          </a:p>
-          <a:p>
-            <a:pPr lvl="1"/>
-            <a:r>
-              <a:rPr lang="en-US" dirty="0"/>
-              <a:t>The lower 16 bits of r3 (the part we care about) move up into the upper 16 bits of r0.</a:t>
-            </a:r>
-          </a:p>
-          <a:p>
-            <a:pPr lvl="1"/>
-            <a:r>
-              <a:rPr lang="en-US" dirty="0"/>
-              <a:t>The bottom 16 bits of r0 become 0.</a:t>
-            </a:r>
-          </a:p>
-          <a:p>
-            <a:r>
-              <a:rPr lang="en-US" dirty="0"/>
-              <a:t>MOV r0, r0, ASR #16</a:t>
-            </a:r>
-          </a:p>
-          <a:p>
-            <a:pPr lvl="1"/>
-            <a:r>
-              <a:rPr lang="en-US" dirty="0"/>
-              <a:t>Shifts the value right by 16 bits, but preserves the sign (arithmetic shift).</a:t>
-            </a:r>
-          </a:p>
-          <a:p>
-            <a:pPr lvl="1"/>
-            <a:r>
-              <a:rPr lang="en-US" dirty="0"/>
-              <a:t>That means if bit 31 (the sign bit after the first shift) is 1, it fills with 1s; if 0, it fills with 0s.</a:t>
-            </a:r>
-          </a:p>
-          <a:p>
-            <a:pPr lvl="1"/>
-            <a:r>
-              <a:rPr lang="en-US" dirty="0"/>
-              <a:t>The result is a sign-extended 16-bit value from the original lower half of r3.</a:t>
-            </a:r>
-          </a:p>
-          <a:p>
-            <a:r>
-              <a:rPr lang="en-US" dirty="0"/>
-              <a:t>Examples: </a:t>
-            </a:r>
-          </a:p>
-          <a:p>
-            <a:r>
-              <a:rPr lang="en-US" dirty="0"/>
-              <a:t>r3 = 0x00001234</a:t>
-            </a:r>
-          </a:p>
-          <a:p>
-            <a:pPr lvl="1"/>
-            <a:r>
-              <a:rPr lang="en-US" dirty="0"/>
-              <a:t>LSL #16 → 0x12340000</a:t>
-            </a:r>
-          </a:p>
-          <a:p>
-            <a:pPr lvl="1"/>
-            <a:r>
-              <a:rPr lang="en-US" dirty="0"/>
-              <a:t>ASR #16 → 0x00001234</a:t>
-            </a:r>
-          </a:p>
-          <a:p>
-            <a:r>
-              <a:rPr lang="en-US" dirty="0"/>
-              <a:t>r3 = 0x0000ABCD</a:t>
-            </a:r>
-          </a:p>
-          <a:p>
-            <a:pPr lvl="1"/>
-            <a:r>
-              <a:rPr lang="en-US" dirty="0"/>
-              <a:t>LSL #16 → 0xABCD0000</a:t>
-            </a:r>
-          </a:p>
-          <a:p>
-            <a:pPr lvl="1"/>
-            <a:r>
-              <a:rPr lang="en-US" dirty="0"/>
-              <a:t>ASR #16 → 0xFFFFABCD</a:t>
-            </a:r>
-          </a:p>
-          <a:p>
-            <a:r>
-              <a:rPr lang="pt-BR" dirty="0"/>
-              <a:t>Can be replaced with a single instruction:</a:t>
-            </a:r>
-          </a:p>
-          <a:p>
-            <a:pPr lvl="1"/>
-            <a:r>
-              <a:rPr lang="pt-BR" dirty="0"/>
-              <a:t>SXTH  r0, r3   ; r0 = (int16_t) r3, sign-extend</a:t>
-            </a:r>
-          </a:p>
-          <a:p>
-            <a:pPr lvl="2"/>
-            <a:r>
-              <a:rPr lang="en-US" dirty="0"/>
-              <a:t>Take the low 16 bits of r3, sign-extend them to 32 bits, and store the result in r0.</a:t>
-            </a:r>
-          </a:p>
-        </p:txBody>
-      </p:sp>
-    </p:spTree>
-    <p:extLst>
-      <p:ext uri="{BB962C8B-B14F-4D97-AF65-F5344CB8AC3E}">
-        <p14:creationId xmlns:p14="http://schemas.microsoft.com/office/powerpoint/2010/main" val="1757812227"/>
-      </p:ext>
-    </p:extLst>
-  </p:cSld>
-  <p:clrMapOvr>
-    <a:masterClrMapping/>
-  </p:clrMapOvr>
-</p:sld>
-</file>
-
-<file path=ppt/slides/slide34.xml><?xml version="1.0" encoding="utf-8"?>
-<p:sld xmlns:a="http://schemas.openxmlformats.org/drawingml/2006/main" xmlns:r="http://schemas.openxmlformats.org/officeDocument/2006/relationships" xmlns:p="http://schemas.openxmlformats.org/presentationml/2006/main">
-  <p:cSld>
-    <p:spTree>
-      <p:nvGrpSpPr>
-        <p:cNvPr id="1" name=""/>
-        <p:cNvGrpSpPr/>
-        <p:nvPr/>
-      </p:nvGrpSpPr>
-      <p:grpSpPr>
-        <a:xfrm>
-          <a:off x="0" y="0"/>
-          <a:ext cx="0" cy="0"/>
-          <a:chOff x="0" y="0"/>
-          <a:chExt cx="0" cy="0"/>
-        </a:xfrm>
-      </p:grpSpPr>
-      <p:sp>
-        <p:nvSpPr>
-          <p:cNvPr id="2" name="Title 1">
-            <a:extLst>
-              <a:ext uri="{FF2B5EF4-FFF2-40B4-BE49-F238E27FC236}">
-                <a16:creationId xmlns:a16="http://schemas.microsoft.com/office/drawing/2014/main" id="{6234EC6E-B891-AF83-E66F-8217385C54F6}"/>
-              </a:ext>
-            </a:extLst>
-          </p:cNvPr>
-          <p:cNvSpPr>
-            <a:spLocks noGrp="1"/>
-          </p:cNvSpPr>
-          <p:nvPr>
-            <p:ph type="title"/>
-          </p:nvPr>
-        </p:nvSpPr>
-        <p:spPr/>
-        <p:txBody>
-          <a:bodyPr/>
-          <a:lstStyle/>
-          <a:p>
-            <a:r>
-              <a:rPr lang="en-US" dirty="0"/>
-              <a:t>Program Understanding</a:t>
-            </a:r>
-          </a:p>
-        </p:txBody>
-      </p:sp>
-      <p:sp>
-        <p:nvSpPr>
-          <p:cNvPr id="3" name="Slide Number Placeholder 2">
-            <a:extLst>
-              <a:ext uri="{FF2B5EF4-FFF2-40B4-BE49-F238E27FC236}">
-                <a16:creationId xmlns:a16="http://schemas.microsoft.com/office/drawing/2014/main" id="{5959EC02-DF33-1CB3-210F-7D09C20A83C0}"/>
-              </a:ext>
-            </a:extLst>
-          </p:cNvPr>
-          <p:cNvSpPr>
-            <a:spLocks noGrp="1"/>
-          </p:cNvSpPr>
-          <p:nvPr>
-            <p:ph type="sldNum" sz="quarter" idx="12"/>
-          </p:nvPr>
-        </p:nvSpPr>
-        <p:spPr/>
-        <p:txBody>
-          <a:bodyPr/>
-          <a:lstStyle/>
-          <a:p>
-            <a:fld id="{EA7C8D44-3667-46F6-9772-CC52308E2A7F}" type="slidenum">
-              <a:rPr kumimoji="0" lang="en-US" smtClean="0"/>
-              <a:pPr/>
-              <a:t>34</a:t>
-            </a:fld>
-            <a:endParaRPr kumimoji="0" lang="en-US" dirty="0"/>
-          </a:p>
-        </p:txBody>
-      </p:sp>
-      <p:sp>
-        <p:nvSpPr>
-          <p:cNvPr id="4" name="Content Placeholder 3">
-            <a:extLst>
-              <a:ext uri="{FF2B5EF4-FFF2-40B4-BE49-F238E27FC236}">
-                <a16:creationId xmlns:a16="http://schemas.microsoft.com/office/drawing/2014/main" id="{3DC23136-53FC-2BF5-8C7C-A3096D3761E3}"/>
-              </a:ext>
-            </a:extLst>
-          </p:cNvPr>
-          <p:cNvSpPr>
-            <a:spLocks noGrp="1"/>
-          </p:cNvSpPr>
-          <p:nvPr>
-            <p:ph sz="quarter" idx="1"/>
-          </p:nvPr>
-        </p:nvSpPr>
-        <p:spPr>
-          <a:xfrm>
-            <a:off x="457200" y="1219200"/>
-            <a:ext cx="8229600" cy="1066800"/>
-          </a:xfrm>
-        </p:spPr>
-        <p:txBody>
-          <a:bodyPr>
-            <a:normAutofit fontScale="70000" lnSpcReduction="20000"/>
-          </a:bodyPr>
-          <a:lstStyle/>
-          <a:p>
-            <a:r>
-              <a:rPr lang="en-US" dirty="0"/>
-              <a:t>Given the following code, fill in the blanks listed next to each instruction with the values that would be in each register or status bit </a:t>
-            </a:r>
-            <a:r>
-              <a:rPr lang="en-US" dirty="0">
-                <a:solidFill>
-                  <a:srgbClr val="C00000"/>
-                </a:solidFill>
-              </a:rPr>
-              <a:t>after each instruction executes</a:t>
-            </a:r>
-            <a:r>
-              <a:rPr lang="en-US" dirty="0"/>
-              <a:t>. Instruction addresses are given to the left of each assembly instruction (not part of the code).  Assume that SP = 0x10000200 at the start of the program.</a:t>
-            </a:r>
-          </a:p>
-        </p:txBody>
-      </p:sp>
-      <p:sp>
-        <p:nvSpPr>
-          <p:cNvPr id="5" name="TextBox 4">
-            <a:extLst>
-              <a:ext uri="{FF2B5EF4-FFF2-40B4-BE49-F238E27FC236}">
-                <a16:creationId xmlns:a16="http://schemas.microsoft.com/office/drawing/2014/main" id="{080C4AE5-B126-9162-362F-24C26D91D6E5}"/>
-              </a:ext>
-            </a:extLst>
-          </p:cNvPr>
-          <p:cNvSpPr txBox="1"/>
-          <p:nvPr/>
-        </p:nvSpPr>
-        <p:spPr>
-          <a:xfrm>
-            <a:off x="641001" y="2182128"/>
-            <a:ext cx="8350599" cy="4278094"/>
-          </a:xfrm>
-          <a:prstGeom prst="rect">
-            <a:avLst/>
-          </a:prstGeom>
-        </p:spPr>
-        <p:style>
-          <a:lnRef idx="2">
-            <a:schemeClr val="accent1"/>
-          </a:lnRef>
-          <a:fillRef idx="1">
-            <a:schemeClr val="lt1"/>
-          </a:fillRef>
-          <a:effectRef idx="0">
-            <a:schemeClr val="accent1"/>
-          </a:effectRef>
-          <a:fontRef idx="minor">
-            <a:schemeClr val="dk1"/>
-          </a:fontRef>
-        </p:style>
-        <p:txBody>
-          <a:bodyPr wrap="square" rtlCol="0">
-            <a:spAutoFit/>
-          </a:bodyPr>
-          <a:lstStyle/>
-          <a:p>
-            <a:r>
-              <a:rPr lang="en-US" sz="1600" dirty="0">
-                <a:latin typeface="Consolas" panose="020B0609020204030204" pitchFamily="49" charset="0"/>
-                <a:cs typeface="Consolas" panose="020B0609020204030204" pitchFamily="49" charset="0"/>
-              </a:rPr>
-              <a:t>          AREA </a:t>
-            </a:r>
-            <a:r>
-              <a:rPr lang="en-US" sz="1600" dirty="0" err="1">
-                <a:latin typeface="Consolas" panose="020B0609020204030204" pitchFamily="49" charset="0"/>
-                <a:cs typeface="Consolas" panose="020B0609020204030204" pitchFamily="49" charset="0"/>
-              </a:rPr>
-              <a:t>mycode</a:t>
-            </a:r>
-            <a:r>
-              <a:rPr lang="en-US" sz="1600" dirty="0">
-                <a:latin typeface="Consolas" panose="020B0609020204030204" pitchFamily="49" charset="0"/>
-                <a:cs typeface="Consolas" panose="020B0609020204030204" pitchFamily="49" charset="0"/>
-              </a:rPr>
-              <a:t>, CODE, READONLY</a:t>
-            </a:r>
-          </a:p>
-          <a:p>
-            <a:r>
-              <a:rPr lang="en-US" sz="1600" dirty="0">
-                <a:latin typeface="Consolas" panose="020B0609020204030204" pitchFamily="49" charset="0"/>
-                <a:cs typeface="Consolas" panose="020B0609020204030204" pitchFamily="49" charset="0"/>
-              </a:rPr>
-              <a:t>          EXPORT __main</a:t>
-            </a:r>
-          </a:p>
-          <a:p>
-            <a:r>
-              <a:rPr lang="en-US" sz="1600" dirty="0">
-                <a:latin typeface="Consolas" panose="020B0609020204030204" pitchFamily="49" charset="0"/>
-                <a:cs typeface="Consolas" panose="020B0609020204030204" pitchFamily="49" charset="0"/>
-              </a:rPr>
-              <a:t>__main    PROC</a:t>
-            </a:r>
-          </a:p>
-          <a:p>
-            <a:r>
-              <a:rPr lang="en-US" sz="1600" dirty="0">
-                <a:latin typeface="Consolas" panose="020B0609020204030204" pitchFamily="49" charset="0"/>
-                <a:cs typeface="Consolas" panose="020B0609020204030204" pitchFamily="49" charset="0"/>
-              </a:rPr>
-              <a:t>0x250     MOV R0, #5</a:t>
-            </a:r>
-          </a:p>
-          <a:p>
-            <a:r>
-              <a:rPr lang="en-US" sz="1600" dirty="0">
-                <a:latin typeface="Consolas" panose="020B0609020204030204" pitchFamily="49" charset="0"/>
-                <a:cs typeface="Consolas" panose="020B0609020204030204" pitchFamily="49" charset="0"/>
-              </a:rPr>
-              <a:t>0x254     MOV R1, #10</a:t>
-            </a:r>
-          </a:p>
-          <a:p>
-            <a:r>
-              <a:rPr lang="en-US" sz="1600" dirty="0">
-                <a:latin typeface="Consolas" panose="020B0609020204030204" pitchFamily="49" charset="0"/>
-                <a:cs typeface="Consolas" panose="020B0609020204030204" pitchFamily="49" charset="0"/>
-              </a:rPr>
-              <a:t>0x258     CMP R0, R1           ; NZCV = ______</a:t>
-            </a:r>
-          </a:p>
-          <a:p>
-            <a:r>
-              <a:rPr lang="en-US" sz="1600" dirty="0">
-                <a:latin typeface="Consolas" panose="020B0609020204030204" pitchFamily="49" charset="0"/>
-                <a:cs typeface="Consolas" panose="020B0609020204030204" pitchFamily="49" charset="0"/>
-              </a:rPr>
-              <a:t>0x25A     BGE loop             ; PC = ______(after this instruction)</a:t>
-            </a:r>
-          </a:p>
-          <a:p>
-            <a:r>
-              <a:rPr lang="en-US" sz="1600" dirty="0">
-                <a:latin typeface="Consolas" panose="020B0609020204030204" pitchFamily="49" charset="0"/>
-                <a:cs typeface="Consolas" panose="020B0609020204030204" pitchFamily="49" charset="0"/>
-              </a:rPr>
-              <a:t>0x25C     BL foo               ; LR = ______, PC = ____(after this inst.)</a:t>
-            </a:r>
-          </a:p>
-          <a:p>
-            <a:r>
-              <a:rPr lang="en-US" sz="1600" dirty="0">
-                <a:latin typeface="Consolas" panose="020B0609020204030204" pitchFamily="49" charset="0"/>
-                <a:cs typeface="Consolas" panose="020B0609020204030204" pitchFamily="49" charset="0"/>
-              </a:rPr>
-              <a:t>0x260 loop B loop</a:t>
-            </a:r>
-          </a:p>
-          <a:p>
-            <a:r>
-              <a:rPr lang="en-US" sz="1600" dirty="0">
-                <a:latin typeface="Consolas" panose="020B0609020204030204" pitchFamily="49" charset="0"/>
-                <a:cs typeface="Consolas" panose="020B0609020204030204" pitchFamily="49" charset="0"/>
-              </a:rPr>
-              <a:t>          ENDP</a:t>
-            </a:r>
-          </a:p>
-          <a:p>
-            <a:endParaRPr lang="en-US" sz="1600" dirty="0">
-              <a:latin typeface="Consolas" panose="020B0609020204030204" pitchFamily="49" charset="0"/>
-              <a:cs typeface="Consolas" panose="020B0609020204030204" pitchFamily="49" charset="0"/>
-            </a:endParaRPr>
-          </a:p>
-          <a:p>
-            <a:r>
-              <a:rPr lang="en-US" sz="1600" dirty="0">
-                <a:latin typeface="Consolas" panose="020B0609020204030204" pitchFamily="49" charset="0"/>
-                <a:cs typeface="Consolas" panose="020B0609020204030204" pitchFamily="49" charset="0"/>
-              </a:rPr>
-              <a:t>foo       PROC</a:t>
-            </a:r>
-          </a:p>
-          <a:p>
-            <a:r>
-              <a:rPr lang="en-US" sz="1600" dirty="0">
-                <a:latin typeface="Consolas" panose="020B0609020204030204" pitchFamily="49" charset="0"/>
-                <a:cs typeface="Consolas" panose="020B0609020204030204" pitchFamily="49" charset="0"/>
-              </a:rPr>
-              <a:t>0x262     PUSH{R0, R1}         ; SP = ____________</a:t>
-            </a:r>
-          </a:p>
-          <a:p>
-            <a:r>
-              <a:rPr lang="en-US" sz="1600" dirty="0">
-                <a:latin typeface="Consolas" panose="020B0609020204030204" pitchFamily="49" charset="0"/>
-                <a:cs typeface="Consolas" panose="020B0609020204030204" pitchFamily="49" charset="0"/>
-              </a:rPr>
-              <a:t>0x264     POP{R1}</a:t>
-            </a:r>
-          </a:p>
-          <a:p>
-            <a:r>
-              <a:rPr lang="en-US" sz="1600" dirty="0">
-                <a:latin typeface="Consolas" panose="020B0609020204030204" pitchFamily="49" charset="0"/>
-                <a:cs typeface="Consolas" panose="020B0609020204030204" pitchFamily="49" charset="0"/>
-              </a:rPr>
-              <a:t>0x266     POP{R0}              ; R0 = __________, SP = ____________</a:t>
-            </a:r>
-          </a:p>
-          <a:p>
-            <a:r>
-              <a:rPr lang="en-US" sz="1600" dirty="0">
-                <a:latin typeface="Consolas" panose="020B0609020204030204" pitchFamily="49" charset="0"/>
-                <a:cs typeface="Consolas" panose="020B0609020204030204" pitchFamily="49" charset="0"/>
-              </a:rPr>
-              <a:t>0x268     BX LR                ; LR = ___________, PC = ____________</a:t>
-            </a:r>
-          </a:p>
-          <a:p>
-            <a:r>
-              <a:rPr lang="en-US" sz="1600" dirty="0">
-                <a:latin typeface="Consolas" panose="020B0609020204030204" pitchFamily="49" charset="0"/>
-                <a:cs typeface="Consolas" panose="020B0609020204030204" pitchFamily="49" charset="0"/>
-              </a:rPr>
-              <a:t>          ENDP</a:t>
-            </a:r>
-          </a:p>
-        </p:txBody>
-      </p:sp>
-    </p:spTree>
-    <p:extLst>
-      <p:ext uri="{BB962C8B-B14F-4D97-AF65-F5344CB8AC3E}">
-        <p14:creationId xmlns:p14="http://schemas.microsoft.com/office/powerpoint/2010/main" val="1829076800"/>
-      </p:ext>
-    </p:extLst>
-  </p:cSld>
-  <p:clrMapOvr>
-    <a:masterClrMapping/>
-  </p:clrMapOvr>
-</p:sld>
-</file>
-
-<file path=ppt/slides/slide35.xml><?xml version="1.0" encoding="utf-8"?>
-<p:sld xmlns:a="http://schemas.openxmlformats.org/drawingml/2006/main" xmlns:r="http://schemas.openxmlformats.org/officeDocument/2006/relationships" xmlns:p="http://schemas.openxmlformats.org/presentationml/2006/main">
-  <p:cSld>
-    <p:spTree>
-      <p:nvGrpSpPr>
-        <p:cNvPr id="1" name="">
-          <a:extLst>
-            <a:ext uri="{FF2B5EF4-FFF2-40B4-BE49-F238E27FC236}">
-              <a16:creationId xmlns:a16="http://schemas.microsoft.com/office/drawing/2014/main" id="{FC0EE055-2D92-9967-6D5A-5CAE67FAA979}"/>
-            </a:ext>
-          </a:extLst>
-        </p:cNvPr>
-        <p:cNvGrpSpPr/>
-        <p:nvPr/>
-      </p:nvGrpSpPr>
-      <p:grpSpPr>
-        <a:xfrm>
-          <a:off x="0" y="0"/>
-          <a:ext cx="0" cy="0"/>
-          <a:chOff x="0" y="0"/>
-          <a:chExt cx="0" cy="0"/>
-        </a:xfrm>
-      </p:grpSpPr>
-      <p:sp>
-        <p:nvSpPr>
-          <p:cNvPr id="2" name="Title 1">
-            <a:extLst>
-              <a:ext uri="{FF2B5EF4-FFF2-40B4-BE49-F238E27FC236}">
-                <a16:creationId xmlns:a16="http://schemas.microsoft.com/office/drawing/2014/main" id="{BBCA5A9E-A770-8E75-1A17-1AA527EAD98D}"/>
-              </a:ext>
-            </a:extLst>
-          </p:cNvPr>
-          <p:cNvSpPr>
-            <a:spLocks noGrp="1"/>
-          </p:cNvSpPr>
-          <p:nvPr>
-            <p:ph type="title"/>
-          </p:nvPr>
-        </p:nvSpPr>
-        <p:spPr/>
-        <p:txBody>
-          <a:bodyPr/>
-          <a:lstStyle/>
-          <a:p>
-            <a:r>
-              <a:rPr lang="en-US" dirty="0"/>
-              <a:t>Program Understanding ANS</a:t>
-            </a:r>
-          </a:p>
-        </p:txBody>
-      </p:sp>
-      <p:sp>
-        <p:nvSpPr>
-          <p:cNvPr id="3" name="Slide Number Placeholder 2">
-            <a:extLst>
-              <a:ext uri="{FF2B5EF4-FFF2-40B4-BE49-F238E27FC236}">
-                <a16:creationId xmlns:a16="http://schemas.microsoft.com/office/drawing/2014/main" id="{E6EB26F8-63B8-7FD8-7173-F712D1EEF322}"/>
-              </a:ext>
-            </a:extLst>
-          </p:cNvPr>
-          <p:cNvSpPr>
-            <a:spLocks noGrp="1"/>
-          </p:cNvSpPr>
-          <p:nvPr>
-            <p:ph type="sldNum" sz="quarter" idx="12"/>
-          </p:nvPr>
-        </p:nvSpPr>
-        <p:spPr/>
-        <p:txBody>
-          <a:bodyPr/>
-          <a:lstStyle/>
-          <a:p>
-            <a:fld id="{EA7C8D44-3667-46F6-9772-CC52308E2A7F}" type="slidenum">
-              <a:rPr kumimoji="0" lang="en-US" smtClean="0"/>
-              <a:pPr/>
-              <a:t>35</a:t>
-            </a:fld>
-            <a:endParaRPr kumimoji="0" lang="en-US" dirty="0"/>
-          </a:p>
-        </p:txBody>
-      </p:sp>
-      <p:sp>
-        <p:nvSpPr>
-          <p:cNvPr id="4" name="Content Placeholder 3">
-            <a:extLst>
-              <a:ext uri="{FF2B5EF4-FFF2-40B4-BE49-F238E27FC236}">
-                <a16:creationId xmlns:a16="http://schemas.microsoft.com/office/drawing/2014/main" id="{6887EA07-332E-3EE5-6B34-92FAAEF7BA60}"/>
-              </a:ext>
-            </a:extLst>
-          </p:cNvPr>
-          <p:cNvSpPr>
-            <a:spLocks noGrp="1"/>
-          </p:cNvSpPr>
-          <p:nvPr>
-            <p:ph sz="quarter" idx="1"/>
-          </p:nvPr>
-        </p:nvSpPr>
-        <p:spPr>
-          <a:xfrm>
-            <a:off x="457200" y="1219200"/>
-            <a:ext cx="8229600" cy="1066800"/>
-          </a:xfrm>
-        </p:spPr>
-        <p:txBody>
-          <a:bodyPr>
-            <a:normAutofit fontScale="70000" lnSpcReduction="20000"/>
-          </a:bodyPr>
-          <a:lstStyle/>
-          <a:p>
-            <a:r>
-              <a:rPr lang="en-US" dirty="0"/>
-              <a:t>Given the following code, fill in the blanks listed next to each instruction with the values that would be in each register or status bit after the instruction executes. Instruction addresses are given to the left of each assembly instruction (not part of the code).  Assume that SP = 0x10000200 at the start of the program.</a:t>
-            </a:r>
-          </a:p>
-        </p:txBody>
-      </p:sp>
-      <p:sp>
-        <p:nvSpPr>
-          <p:cNvPr id="5" name="TextBox 4">
-            <a:extLst>
-              <a:ext uri="{FF2B5EF4-FFF2-40B4-BE49-F238E27FC236}">
-                <a16:creationId xmlns:a16="http://schemas.microsoft.com/office/drawing/2014/main" id="{667005E6-B78A-DE6F-E3EA-2180A0B55757}"/>
-              </a:ext>
-            </a:extLst>
-          </p:cNvPr>
-          <p:cNvSpPr txBox="1"/>
-          <p:nvPr/>
-        </p:nvSpPr>
-        <p:spPr>
-          <a:xfrm>
-            <a:off x="304800" y="2122706"/>
-            <a:ext cx="8534400" cy="4278094"/>
-          </a:xfrm>
-          <a:prstGeom prst="rect">
-            <a:avLst/>
-          </a:prstGeom>
-        </p:spPr>
-        <p:style>
-          <a:lnRef idx="2">
-            <a:schemeClr val="accent1"/>
-          </a:lnRef>
-          <a:fillRef idx="1">
-            <a:schemeClr val="lt1"/>
-          </a:fillRef>
-          <a:effectRef idx="0">
-            <a:schemeClr val="accent1"/>
-          </a:effectRef>
-          <a:fontRef idx="minor">
-            <a:schemeClr val="dk1"/>
-          </a:fontRef>
-        </p:style>
-        <p:txBody>
-          <a:bodyPr wrap="square" rtlCol="0">
-            <a:spAutoFit/>
-          </a:bodyPr>
-          <a:lstStyle/>
-          <a:p>
-            <a:r>
-              <a:rPr lang="en-US" sz="1600" dirty="0">
-                <a:latin typeface="Consolas" panose="020B0609020204030204" pitchFamily="49" charset="0"/>
-                <a:cs typeface="Consolas" panose="020B0609020204030204" pitchFamily="49" charset="0"/>
-              </a:rPr>
-              <a:t>          AREA </a:t>
-            </a:r>
-            <a:r>
-              <a:rPr lang="en-US" sz="1600" dirty="0" err="1">
-                <a:latin typeface="Consolas" panose="020B0609020204030204" pitchFamily="49" charset="0"/>
-                <a:cs typeface="Consolas" panose="020B0609020204030204" pitchFamily="49" charset="0"/>
-              </a:rPr>
-              <a:t>mycode</a:t>
-            </a:r>
-            <a:r>
-              <a:rPr lang="en-US" sz="1600" dirty="0">
-                <a:latin typeface="Consolas" panose="020B0609020204030204" pitchFamily="49" charset="0"/>
-                <a:cs typeface="Consolas" panose="020B0609020204030204" pitchFamily="49" charset="0"/>
-              </a:rPr>
-              <a:t>, CODE, READONLY</a:t>
-            </a:r>
-          </a:p>
-          <a:p>
-            <a:r>
-              <a:rPr lang="en-US" sz="1600" dirty="0">
-                <a:latin typeface="Consolas" panose="020B0609020204030204" pitchFamily="49" charset="0"/>
-                <a:cs typeface="Consolas" panose="020B0609020204030204" pitchFamily="49" charset="0"/>
-              </a:rPr>
-              <a:t>          EXPORT __main</a:t>
-            </a:r>
-          </a:p>
-          <a:p>
-            <a:r>
-              <a:rPr lang="en-US" sz="1600" dirty="0">
-                <a:latin typeface="Consolas" panose="020B0609020204030204" pitchFamily="49" charset="0"/>
-                <a:cs typeface="Consolas" panose="020B0609020204030204" pitchFamily="49" charset="0"/>
-              </a:rPr>
-              <a:t>__main    PROC</a:t>
-            </a:r>
-          </a:p>
-          <a:p>
-            <a:r>
-              <a:rPr lang="en-US" sz="1600" dirty="0">
-                <a:latin typeface="Consolas" panose="020B0609020204030204" pitchFamily="49" charset="0"/>
-                <a:cs typeface="Consolas" panose="020B0609020204030204" pitchFamily="49" charset="0"/>
-              </a:rPr>
-              <a:t>0x250     MOV R0, #5</a:t>
-            </a:r>
-          </a:p>
-          <a:p>
-            <a:r>
-              <a:rPr lang="en-US" sz="1600" dirty="0">
-                <a:latin typeface="Consolas" panose="020B0609020204030204" pitchFamily="49" charset="0"/>
-                <a:cs typeface="Consolas" panose="020B0609020204030204" pitchFamily="49" charset="0"/>
-              </a:rPr>
-              <a:t>0x254     MOV R1, #10</a:t>
-            </a:r>
-          </a:p>
-          <a:p>
-            <a:r>
-              <a:rPr lang="en-US" sz="1600" dirty="0">
-                <a:latin typeface="Consolas" panose="020B0609020204030204" pitchFamily="49" charset="0"/>
-                <a:cs typeface="Consolas" panose="020B0609020204030204" pitchFamily="49" charset="0"/>
-              </a:rPr>
-              <a:t>0x258     CMP R0, R1           ; NZCV = 1000</a:t>
-            </a:r>
-          </a:p>
-          <a:p>
-            <a:r>
-              <a:rPr lang="en-US" sz="1600" dirty="0">
-                <a:latin typeface="Consolas" panose="020B0609020204030204" pitchFamily="49" charset="0"/>
-                <a:cs typeface="Consolas" panose="020B0609020204030204" pitchFamily="49" charset="0"/>
-              </a:rPr>
-              <a:t>0x25A     BGE loop             ; PC = 0x25C (after this instruction)</a:t>
-            </a:r>
-          </a:p>
-          <a:p>
-            <a:r>
-              <a:rPr lang="en-US" sz="1600" dirty="0">
-                <a:latin typeface="Consolas" panose="020B0609020204030204" pitchFamily="49" charset="0"/>
-                <a:cs typeface="Consolas" panose="020B0609020204030204" pitchFamily="49" charset="0"/>
-              </a:rPr>
-              <a:t>0x25C     BL foo               ; LR = 0x260, PC = 0x262 (after this inst.)</a:t>
-            </a:r>
-          </a:p>
-          <a:p>
-            <a:r>
-              <a:rPr lang="en-US" sz="1600" dirty="0">
-                <a:latin typeface="Consolas" panose="020B0609020204030204" pitchFamily="49" charset="0"/>
-                <a:cs typeface="Consolas" panose="020B0609020204030204" pitchFamily="49" charset="0"/>
-              </a:rPr>
-              <a:t>0x260 loop B loop</a:t>
-            </a:r>
-          </a:p>
-          <a:p>
-            <a:r>
-              <a:rPr lang="en-US" sz="1600" dirty="0">
-                <a:latin typeface="Consolas" panose="020B0609020204030204" pitchFamily="49" charset="0"/>
-                <a:cs typeface="Consolas" panose="020B0609020204030204" pitchFamily="49" charset="0"/>
-              </a:rPr>
-              <a:t>          ENDP</a:t>
-            </a:r>
-          </a:p>
-          <a:p>
-            <a:endParaRPr lang="en-US" sz="1600" dirty="0">
-              <a:latin typeface="Consolas" panose="020B0609020204030204" pitchFamily="49" charset="0"/>
-              <a:cs typeface="Consolas" panose="020B0609020204030204" pitchFamily="49" charset="0"/>
-            </a:endParaRPr>
-          </a:p>
-          <a:p>
-            <a:r>
-              <a:rPr lang="en-US" sz="1600" dirty="0">
-                <a:latin typeface="Consolas" panose="020B0609020204030204" pitchFamily="49" charset="0"/>
-                <a:cs typeface="Consolas" panose="020B0609020204030204" pitchFamily="49" charset="0"/>
-              </a:rPr>
-              <a:t>foo       PROC</a:t>
-            </a:r>
-          </a:p>
-          <a:p>
-            <a:r>
-              <a:rPr lang="en-US" sz="1600" dirty="0">
-                <a:latin typeface="Consolas" panose="020B0609020204030204" pitchFamily="49" charset="0"/>
-                <a:cs typeface="Consolas" panose="020B0609020204030204" pitchFamily="49" charset="0"/>
-              </a:rPr>
-              <a:t>0x262     PUSH{R0, R1}         ; SP = </a:t>
-            </a:r>
-            <a:r>
-              <a:rPr lang="en-US" sz="1600" dirty="0"/>
-              <a:t>0x100001F8</a:t>
-            </a:r>
-            <a:endParaRPr lang="en-US" sz="1600" dirty="0">
-              <a:latin typeface="Consolas" panose="020B0609020204030204" pitchFamily="49" charset="0"/>
-              <a:cs typeface="Consolas" panose="020B0609020204030204" pitchFamily="49" charset="0"/>
-            </a:endParaRPr>
-          </a:p>
-          <a:p>
-            <a:r>
-              <a:rPr lang="en-US" sz="1600" dirty="0">
-                <a:latin typeface="Consolas" panose="020B0609020204030204" pitchFamily="49" charset="0"/>
-                <a:cs typeface="Consolas" panose="020B0609020204030204" pitchFamily="49" charset="0"/>
-              </a:rPr>
-              <a:t>0x264     POP{R1}              ; R1 = 5</a:t>
-            </a:r>
-          </a:p>
-          <a:p>
-            <a:r>
-              <a:rPr lang="en-US" sz="1600" dirty="0">
-                <a:latin typeface="Consolas" panose="020B0609020204030204" pitchFamily="49" charset="0"/>
-                <a:cs typeface="Consolas" panose="020B0609020204030204" pitchFamily="49" charset="0"/>
-              </a:rPr>
-              <a:t>0x266     POP{R0}              ; R0 = 10, SP = </a:t>
-            </a:r>
-            <a:r>
-              <a:rPr lang="en-US" sz="1600" dirty="0"/>
-              <a:t>0x10000200</a:t>
-            </a:r>
-            <a:endParaRPr lang="en-US" sz="1600" dirty="0">
-              <a:latin typeface="Consolas" panose="020B0609020204030204" pitchFamily="49" charset="0"/>
-              <a:cs typeface="Consolas" panose="020B0609020204030204" pitchFamily="49" charset="0"/>
-            </a:endParaRPr>
-          </a:p>
-          <a:p>
-            <a:r>
-              <a:rPr lang="en-US" sz="1600" dirty="0">
-                <a:latin typeface="Consolas" panose="020B0609020204030204" pitchFamily="49" charset="0"/>
-                <a:cs typeface="Consolas" panose="020B0609020204030204" pitchFamily="49" charset="0"/>
-              </a:rPr>
-              <a:t>0x268     BX LR                ; LR = 0x260, PC = 0x260 (after this inst.)</a:t>
-            </a:r>
-          </a:p>
-          <a:p>
-            <a:r>
-              <a:rPr lang="en-US" sz="1600" dirty="0">
-                <a:latin typeface="Consolas" panose="020B0609020204030204" pitchFamily="49" charset="0"/>
-                <a:cs typeface="Consolas" panose="020B0609020204030204" pitchFamily="49" charset="0"/>
-              </a:rPr>
-              <a:t>          ENDP</a:t>
-            </a:r>
-          </a:p>
-        </p:txBody>
-      </p:sp>
-    </p:spTree>
-    <p:extLst>
-      <p:ext uri="{BB962C8B-B14F-4D97-AF65-F5344CB8AC3E}">
-        <p14:creationId xmlns:p14="http://schemas.microsoft.com/office/powerpoint/2010/main" val="2287290416"/>
-      </p:ext>
-    </p:extLst>
-  </p:cSld>
-  <p:clrMapOvr>
-    <a:masterClrMapping/>
-  </p:clrMapOvr>
-</p:sld>
-</file>
-
 <file path=ppt/slides/slide36.xml><?xml version="1.0" encoding="utf-8"?>
 <p:sld xmlns:a="http://schemas.openxmlformats.org/drawingml/2006/main" xmlns:r="http://schemas.openxmlformats.org/officeDocument/2006/relationships" xmlns:p="http://schemas.openxmlformats.org/presentationml/2006/main">
   <p:cSld>
@@ -33902,7 +33601,7 @@
           <p:cNvPr id="2" name="Title 1">
             <a:extLst>
               <a:ext uri="{FF2B5EF4-FFF2-40B4-BE49-F238E27FC236}">
-                <a16:creationId xmlns:a16="http://schemas.microsoft.com/office/drawing/2014/main" id="{66BC4FE6-4AA6-4480-9C1A-B149B1641A6D}"/>
+                <a16:creationId xmlns:a16="http://schemas.microsoft.com/office/drawing/2014/main" id="{0B680E2F-C62E-EF54-5DBD-340196E1CA5F}"/>
               </a:ext>
             </a:extLst>
           </p:cNvPr>
@@ -33920,7 +33619,7 @@
           <a:p>
             <a:r>
               <a:rPr lang="en-US" dirty="0"/>
-              <a:t>Detailed Explanations</a:t>
+              <a:t>Explanations</a:t>
             </a:r>
           </a:p>
         </p:txBody>
@@ -33930,7 +33629,7 @@
           <p:cNvPr id="3" name="Slide Number Placeholder 2">
             <a:extLst>
               <a:ext uri="{FF2B5EF4-FFF2-40B4-BE49-F238E27FC236}">
-                <a16:creationId xmlns:a16="http://schemas.microsoft.com/office/drawing/2014/main" id="{BD64E820-1675-B2B0-054F-FAA01CAC05B1}"/>
+                <a16:creationId xmlns:a16="http://schemas.microsoft.com/office/drawing/2014/main" id="{9ECF1D85-43EB-71B3-363D-9FF339EE4AA2}"/>
               </a:ext>
             </a:extLst>
           </p:cNvPr>
@@ -33960,7 +33659,7 @@
           <p:cNvPr id="4" name="Content Placeholder 3">
             <a:extLst>
               <a:ext uri="{FF2B5EF4-FFF2-40B4-BE49-F238E27FC236}">
-                <a16:creationId xmlns:a16="http://schemas.microsoft.com/office/drawing/2014/main" id="{0D3349F2-AD23-9931-E5C9-567BF200C2ED}"/>
+                <a16:creationId xmlns:a16="http://schemas.microsoft.com/office/drawing/2014/main" id="{E4F57FE1-A328-6D2A-AFB7-A6C1600FE210}"/>
               </a:ext>
             </a:extLst>
           </p:cNvPr>
@@ -33973,167 +33672,139 @@
         </p:nvSpPr>
         <p:spPr>
           <a:xfrm>
-            <a:off x="457200" y="1143000"/>
+            <a:off x="457200" y="1219200"/>
             <a:ext cx="8229600" cy="5334000"/>
           </a:xfrm>
         </p:spPr>
         <p:txBody>
           <a:bodyPr>
-            <a:normAutofit fontScale="55000" lnSpcReduction="20000"/>
+            <a:normAutofit fontScale="70000" lnSpcReduction="20000"/>
           </a:bodyPr>
           <a:lstStyle/>
           <a:p>
             <a:r>
               <a:rPr lang="en-US" dirty="0"/>
-              <a:t>1. CMP R0, R1 (0x858/0x258)</a:t>
+              <a:t>These two lines sign-extend the lower 16 bits of r3 into a full 32-bit value in r0.</a:t>
+            </a:r>
+          </a:p>
+          <a:p>
+            <a:r>
+              <a:rPr lang="en-US" dirty="0"/>
+              <a:t>MOV r0, r3, LSL #16</a:t>
             </a:r>
           </a:p>
           <a:p>
             <a:pPr lvl="1"/>
             <a:r>
               <a:rPr lang="en-US" dirty="0"/>
-              <a:t>Performs: 8 - 10</a:t>
+              <a:t>Shifts the value in r3 left by 16 bits.</a:t>
             </a:r>
           </a:p>
           <a:p>
             <a:pPr lvl="1"/>
             <a:r>
               <a:rPr lang="en-US" dirty="0"/>
-              <a:t>NZCV = 1000 (Negative=1, Zero=0, Carry=0, Overflow=0)</a:t>
-            </a:r>
-          </a:p>
-          <a:p>
+              <a:t>The lower 16 bits of r3 (the part we care about) move up into the upper 16 bits of r0.</a:t>
+            </a:r>
+          </a:p>
+          <a:p>
+            <a:pPr lvl="1"/>
             <a:r>
               <a:rPr lang="en-US" dirty="0"/>
-              <a:t>2. BGE loop (0x25A)</a:t>
+              <a:t>The bottom 16 bits of r0 become 0.</a:t>
+            </a:r>
+          </a:p>
+          <a:p>
+            <a:r>
+              <a:rPr lang="en-US" dirty="0"/>
+              <a:t>MOV r0, r0, ASR #16</a:t>
             </a:r>
           </a:p>
           <a:p>
             <a:pPr lvl="1"/>
             <a:r>
               <a:rPr lang="en-US" dirty="0"/>
-              <a:t>BGE checks if N == V (Greater or Equal in signed comparison)</a:t>
+              <a:t>Shifts the value right by 16 bits, but preserves the sign (arithmetic shift).</a:t>
             </a:r>
           </a:p>
           <a:p>
             <a:pPr lvl="1"/>
             <a:r>
               <a:rPr lang="en-US" dirty="0"/>
-              <a:t>Since N=1 and V=0, condition is FALSE</a:t>
-            </a:r>
-          </a:p>
-          <a:p>
+              <a:t>That means if bit 31 (the sign bit after the first shift) is 1, it fills with 1s; if 0, it fills with 0s.</a:t>
+            </a:r>
+          </a:p>
+          <a:p>
+            <a:pPr lvl="1"/>
             <a:r>
               <a:rPr lang="en-US" dirty="0"/>
-              <a:t>Branch NOT taken, continues to next instruction</a:t>
+              <a:t>The result is a sign-extended 16-bit value from the original lower half of r3.</a:t>
+            </a:r>
+          </a:p>
+          <a:p>
+            <a:r>
+              <a:rPr lang="en-US" dirty="0"/>
+              <a:t>Examples: </a:t>
+            </a:r>
+          </a:p>
+          <a:p>
+            <a:r>
+              <a:rPr lang="en-US" dirty="0"/>
+              <a:t>r3 = 0x00001234</a:t>
             </a:r>
           </a:p>
           <a:p>
             <a:pPr lvl="1"/>
             <a:r>
               <a:rPr lang="en-US" dirty="0"/>
-              <a:t>PC = 0x25C</a:t>
-            </a:r>
-          </a:p>
-          <a:p>
+              <a:t>LSL #16 → 0x12340000</a:t>
+            </a:r>
+          </a:p>
+          <a:p>
+            <a:pPr lvl="1"/>
             <a:r>
               <a:rPr lang="en-US" dirty="0"/>
-              <a:t>3. BL foo (0x25C)</a:t>
+              <a:t>ASR #16 → 0x00001234</a:t>
+            </a:r>
+          </a:p>
+          <a:p>
+            <a:r>
+              <a:rPr lang="en-US" dirty="0"/>
+              <a:t>r3 = 0x0000ABCD</a:t>
             </a:r>
           </a:p>
           <a:p>
             <a:pPr lvl="1"/>
             <a:r>
               <a:rPr lang="en-US" dirty="0"/>
-              <a:t>Saves return address in LR and branches to foo</a:t>
+              <a:t>LSL #16 → 0xABCD0000</a:t>
             </a:r>
           </a:p>
           <a:p>
             <a:pPr lvl="1"/>
             <a:r>
               <a:rPr lang="en-US" dirty="0"/>
-              <a:t>LR = 0x260 (next instruction after BL)</a:t>
+              <a:t>ASR #16 → 0xFFFFABCD</a:t>
+            </a:r>
+          </a:p>
+          <a:p>
+            <a:r>
+              <a:rPr lang="pt-BR" dirty="0"/>
+              <a:t>Can be replaced with a single instruction:</a:t>
             </a:r>
           </a:p>
           <a:p>
             <a:pPr lvl="1"/>
             <a:r>
+              <a:rPr lang="pt-BR" dirty="0"/>
+              <a:t>SXTH  r0, r3   ; r0 = (int16_t) r3, sign-extend</a:t>
+            </a:r>
+          </a:p>
+          <a:p>
+            <a:pPr lvl="2"/>
+            <a:r>
               <a:rPr lang="en-US" dirty="0"/>
-              <a:t>PC = 0x262 (address of foo)</a:t>
-            </a:r>
-          </a:p>
-          <a:p>
-            <a:r>
-              <a:rPr lang="en-US" dirty="0"/>
-              <a:t>4. PUSH {R0, R1} (0x262)</a:t>
-            </a:r>
-          </a:p>
-          <a:p>
-            <a:pPr lvl="1"/>
-            <a:r>
-              <a:rPr lang="en-US" dirty="0"/>
-              <a:t>Stack is descending and full, so SP decrements by 8 bytes (2 registers × 4 bytes)</a:t>
-            </a:r>
-          </a:p>
-          <a:p>
-            <a:pPr lvl="1"/>
-            <a:r>
-              <a:rPr lang="en-US" dirty="0"/>
-              <a:t>SP = 0x10000200 - 8 = 0x100001F8</a:t>
-            </a:r>
-          </a:p>
-          <a:p>
-            <a:r>
-              <a:rPr lang="en-US" dirty="0"/>
-              <a:t>5. POP {R0} (0x266)</a:t>
-            </a:r>
-          </a:p>
-          <a:p>
-            <a:pPr lvl="1"/>
-            <a:r>
-              <a:rPr lang="en-US" dirty="0"/>
-              <a:t>After popping both registers, R0 and R1 are swapped</a:t>
-            </a:r>
-          </a:p>
-          <a:p>
-            <a:pPr lvl="1"/>
-            <a:r>
-              <a:rPr lang="en-US" dirty="0"/>
-              <a:t>R0 = 10 (original R1 value)</a:t>
-            </a:r>
-          </a:p>
-          <a:p>
-            <a:pPr lvl="1"/>
-            <a:r>
-              <a:rPr lang="en-US" dirty="0"/>
-              <a:t>SP = 0x10000200 (back to original)</a:t>
-            </a:r>
-          </a:p>
-          <a:p>
-            <a:r>
-              <a:rPr lang="en-US" dirty="0"/>
-              <a:t>6. BX LR (0x268)</a:t>
-            </a:r>
-          </a:p>
-          <a:p>
-            <a:pPr lvl="1"/>
-            <a:r>
-              <a:rPr lang="en-US" dirty="0"/>
-              <a:t>Returns to address stored in LR</a:t>
-            </a:r>
-          </a:p>
-          <a:p>
-            <a:pPr lvl="1"/>
-            <a:r>
-              <a:rPr lang="en-US" dirty="0"/>
-              <a:t>LR = 0x260 (unchanged)</a:t>
-            </a:r>
-          </a:p>
-          <a:p>
-            <a:pPr lvl="1"/>
-            <a:r>
-              <a:rPr lang="en-US" dirty="0"/>
-              <a:t>PC = 0x260 (returns to caller)</a:t>
+              <a:t>Take the low 16 bits of r3, sign-extend them to 32 bits, and store the result in r0.</a:t>
             </a:r>
           </a:p>
         </p:txBody>
@@ -34141,7 +33812,7 @@
     </p:spTree>
     <p:extLst>
       <p:ext uri="{BB962C8B-B14F-4D97-AF65-F5344CB8AC3E}">
-        <p14:creationId xmlns:p14="http://schemas.microsoft.com/office/powerpoint/2010/main" val="1555766300"/>
+        <p14:creationId xmlns:p14="http://schemas.microsoft.com/office/powerpoint/2010/main" val="1757812227"/>
       </p:ext>
     </p:extLst>
   </p:cSld>
